--- a/system-design-101/vi/lessons/sd-13-025/slides/sd-13-025.pptx
+++ b/system-design-101/vi/lessons/sd-13-025/slides/sd-13-025.pptx
@@ -1798,7 +1798,7 @@
         <p:spPr>
           <a:xfrm>
             <a:off x="914400" y="1524000"/>
-            <a:ext cx="16459200" cy="2286000"/>
+            <a:ext cx="16459200" cy="2476500"/>
           </a:xfrm>
           <a:prstGeom prst="rect">
             <a:avLst/>
@@ -1807,17 +1807,17 @@
           <a:ln/>
         </p:spPr>
         <p:txBody>
-          <a:bodyPr wrap="square" lIns="0" tIns="66675" rIns="0" bIns="-66675" rtlCol="0" anchor="t"/>
+          <a:bodyPr wrap="square" lIns="0" tIns="72009" rIns="0" bIns="-72009" rtlCol="0" anchor="t"/>
           <a:lstStyle/>
           <a:p>
             <a:pPr algn="l" indent="0" marL="0">
               <a:lnSpc>
-                <a:spcPts val="7800"/>
+                <a:spcPts val="8424"/>
               </a:lnSpc>
               <a:buNone/>
             </a:pPr>
             <a:r>
-              <a:rPr lang="en-US" sz="7500" dirty="0" spc="-15" kern="0">
+              <a:rPr lang="en-US" sz="8100" dirty="0" spc="-12" kern="0">
                 <a:solidFill>
                   <a:srgbClr val="F3EEE3"/>
                 </a:solidFill>
@@ -1828,7 +1828,7 @@
               <a:t>Pod</a:t>
             </a:r>
             <a:r>
-              <a:rPr lang="en-US" sz="7500" dirty="0" spc="1" kern="0">
+              <a:rPr lang="en-US" sz="8100" dirty="0" spc="-1" kern="0">
                 <a:solidFill>
                   <a:srgbClr val="F3EEE3"/>
                 </a:solidFill>
@@ -1839,7 +1839,7 @@
               <a:t> không</a:t>
             </a:r>
             <a:r>
-              <a:rPr lang="en-US" sz="7500" dirty="0" spc="5" kern="0">
+              <a:rPr lang="en-US" sz="8100" dirty="0" spc="5" kern="0">
                 <a:solidFill>
                   <a:srgbClr val="F3EEE3"/>
                 </a:solidFill>
@@ -1850,7 +1850,7 @@
               <a:t> chạy:</a:t>
             </a:r>
             <a:r>
-              <a:rPr lang="en-US" sz="7500" dirty="0" spc="1" kern="0">
+              <a:rPr lang="en-US" sz="8100" dirty="0" spc="0" kern="0">
                 <a:solidFill>
                   <a:srgbClr val="F3EEE3"/>
                 </a:solidFill>
@@ -1861,7 +1861,7 @@
               <a:t> chẩn</a:t>
             </a:r>
             <a:r>
-              <a:rPr lang="en-US" sz="7500" dirty="0" spc="4" kern="0">
+              <a:rPr lang="en-US" sz="8100" dirty="0" spc="5" kern="0">
                 <a:solidFill>
                   <a:srgbClr val="F3EEE3"/>
                 </a:solidFill>
@@ -1872,7 +1872,7 @@
               <a:t> đoán</a:t>
             </a:r>
             <a:r>
-              <a:rPr lang="en-US" sz="7500" dirty="0" spc="0" kern="0">
+              <a:rPr lang="en-US" sz="8100" dirty="0" spc="1" kern="0">
                 <a:solidFill>
                   <a:srgbClr val="F3EEE3"/>
                 </a:solidFill>
@@ -1883,7 +1883,7 @@
               <a:t> theo</a:t>
             </a:r>
             <a:r>
-              <a:rPr lang="en-US" sz="7500" dirty="0" spc="9" kern="0">
+              <a:rPr lang="en-US" sz="8100" dirty="0" spc="10" kern="0">
                 <a:solidFill>
                   <a:srgbClr val="F3EEE3"/>
                 </a:solidFill>
@@ -1894,7 +1894,7 @@
               <a:t> từng</a:t>
             </a:r>
             <a:r>
-              <a:rPr lang="en-US" sz="7500" dirty="0" spc="3" kern="0">
+              <a:rPr lang="en-US" sz="8100" dirty="0" spc="1" kern="0">
                 <a:solidFill>
                   <a:srgbClr val="F3EEE3"/>
                 </a:solidFill>
@@ -1904,7 +1904,7 @@
               </a:rPr>
               <a:t> chặng</a:t>
             </a:r>
-            <a:endParaRPr lang="en-US" sz="7500" dirty="0"/>
+            <a:endParaRPr lang="en-US" sz="8100" dirty="0"/>
           </a:p>
         </p:txBody>
       </p:sp>
@@ -2737,7 +2737,7 @@
               <a:t> nhóm</a:t>
             </a:r>
             <a:r>
-              <a:rPr lang="en-US" sz="1650" dirty="0" spc="-3" kern="0">
+              <a:rPr lang="en-US" sz="1650" dirty="0" spc="-4" kern="0">
                 <a:solidFill>
                   <a:srgbClr val="9AA0B5"/>
                 </a:solidFill>
@@ -2745,10 +2745,10 @@
                 <a:ea typeface="Be Vietnam Pro" pitchFamily="34" charset="-122"/>
                 <a:cs typeface="Be Vietnam Pro" pitchFamily="34" charset="-120"/>
               </a:rPr>
-              <a:t> Quan</a:t>
-            </a:r>
-            <a:r>
-              <a:rPr lang="en-US" sz="1650" dirty="0" spc="-9" kern="0">
+              <a:t> DevOps</a:t>
+            </a:r>
+            <a:r>
+              <a:rPr lang="en-US" sz="1650" dirty="0" spc="-7" kern="0">
                 <a:solidFill>
                   <a:srgbClr val="9AA0B5"/>
                 </a:solidFill>
@@ -2756,7 +2756,7 @@
                 <a:ea typeface="Be Vietnam Pro" pitchFamily="34" charset="-122"/>
                 <a:cs typeface="Be Vietnam Pro" pitchFamily="34" charset="-120"/>
               </a:rPr>
-              <a:t> sát</a:t>
+              <a:t> và</a:t>
             </a:r>
             <a:r>
               <a:rPr lang="en-US" sz="1650" dirty="0" spc="3" kern="0">
@@ -2767,18 +2767,7 @@
                 <a:ea typeface="Be Vietnam Pro" pitchFamily="34" charset="-122"/>
                 <a:cs typeface="Be Vietnam Pro" pitchFamily="34" charset="-120"/>
               </a:rPr>
-              <a:t> hệ</a:t>
-            </a:r>
-            <a:r>
-              <a:rPr lang="en-US" sz="1650" dirty="0" spc="1" kern="0">
-                <a:solidFill>
-                  <a:srgbClr val="9AA0B5"/>
-                </a:solidFill>
-                <a:latin typeface="Be Vietnam Pro" pitchFamily="34" charset="0"/>
-                <a:ea typeface="Be Vietnam Pro" pitchFamily="34" charset="-122"/>
-                <a:cs typeface="Be Vietnam Pro" pitchFamily="34" charset="-120"/>
-              </a:rPr>
-              <a:t> thống</a:t>
+              <a:t> CI/CD</a:t>
             </a:r>
             <a:endParaRPr lang="en-US" sz="1650" dirty="0"/>
           </a:p>
@@ -5451,7 +5440,7 @@
         <p:spPr>
           <a:xfrm>
             <a:off x="914400" y="1333500"/>
-            <a:ext cx="16459200" cy="1143000"/>
+            <a:ext cx="16459200" cy="1047750"/>
           </a:xfrm>
           <a:prstGeom prst="rect">
             <a:avLst/>
@@ -5467,7 +5456,7 @@
               <a:buNone/>
             </a:pPr>
             <a:r>
-              <a:rPr lang="en-US" sz="6600" dirty="0" spc="3" kern="0">
+              <a:rPr lang="en-US" sz="6900" dirty="0" spc="7" kern="0">
                 <a:solidFill>
                   <a:srgbClr val="F3EEE3"/>
                 </a:solidFill>
@@ -5478,7 +5467,7 @@
               <a:t>Scheduler</a:t>
             </a:r>
             <a:r>
-              <a:rPr lang="en-US" sz="6600" dirty="0" spc="-1" kern="0">
+              <a:rPr lang="en-US" sz="6900" dirty="0" spc="0" kern="0">
                 <a:solidFill>
                   <a:srgbClr val="F3EEE3"/>
                 </a:solidFill>
@@ -5489,7 +5478,7 @@
               <a:t> không chọn</a:t>
             </a:r>
             <a:r>
-              <a:rPr lang="en-US" sz="6600" dirty="0" spc="-85" kern="0">
+              <a:rPr lang="en-US" sz="6900" dirty="0" spc="-92" kern="0">
                 <a:solidFill>
                   <a:srgbClr val="F3EEE3"/>
                 </a:solidFill>
@@ -5500,7 +5489,7 @@
               <a:t> được</a:t>
             </a:r>
             <a:r>
-              <a:rPr lang="en-US" sz="6600" dirty="0" spc="0" kern="0">
+              <a:rPr lang="en-US" sz="6900" dirty="0" spc="2" kern="0">
                 <a:solidFill>
                   <a:srgbClr val="F3EEE3"/>
                 </a:solidFill>
@@ -5510,7 +5499,7 @@
               </a:rPr>
               <a:t> node</a:t>
             </a:r>
-            <a:endParaRPr lang="en-US" sz="6600" dirty="0"/>
+            <a:endParaRPr lang="en-US" sz="6900" dirty="0"/>
           </a:p>
         </p:txBody>
       </p:sp>
@@ -6854,7 +6843,7 @@
         <p:spPr>
           <a:xfrm>
             <a:off x="914400" y="1333500"/>
-            <a:ext cx="16459200" cy="1143000"/>
+            <a:ext cx="16459200" cy="1047750"/>
           </a:xfrm>
           <a:prstGeom prst="rect">
             <a:avLst/>
@@ -6870,7 +6859,7 @@
               <a:buNone/>
             </a:pPr>
             <a:r>
-              <a:rPr lang="en-US" sz="6000" dirty="0" spc="2" kern="0">
+              <a:rPr lang="en-US" sz="6900" dirty="0" spc="1" kern="0">
                 <a:solidFill>
                   <a:srgbClr val="14161C"/>
                 </a:solidFill>
@@ -6881,7 +6870,7 @@
               <a:t>Node</a:t>
             </a:r>
             <a:r>
-              <a:rPr lang="en-US" sz="6000" dirty="0" spc="-41" kern="0">
+              <a:rPr lang="en-US" sz="6900" dirty="0" spc="-47" kern="0">
                 <a:solidFill>
                   <a:srgbClr val="14161C"/>
                 </a:solidFill>
@@ -6892,7 +6881,7 @@
               <a:t> chưa</a:t>
             </a:r>
             <a:r>
-              <a:rPr lang="en-US" sz="6000" dirty="0" spc="-23" kern="0">
+              <a:rPr lang="en-US" sz="6900" dirty="0" spc="-27" kern="0">
                 <a:solidFill>
                   <a:srgbClr val="14161C"/>
                 </a:solidFill>
@@ -6903,7 +6892,7 @@
               <a:t> khởi</a:t>
             </a:r>
             <a:r>
-              <a:rPr lang="en-US" sz="6000" dirty="0" spc="8" kern="0">
+              <a:rPr lang="en-US" sz="6900" dirty="0" spc="11" kern="0">
                 <a:solidFill>
                   <a:srgbClr val="14161C"/>
                 </a:solidFill>
@@ -6914,7 +6903,7 @@
               <a:t> động</a:t>
             </a:r>
             <a:r>
-              <a:rPr lang="en-US" sz="6000" dirty="0" spc="-61" kern="0">
+              <a:rPr lang="en-US" sz="6900" dirty="0" spc="-69" kern="0">
                 <a:solidFill>
                   <a:srgbClr val="14161C"/>
                 </a:solidFill>
@@ -6925,7 +6914,7 @@
               <a:t> xong</a:t>
             </a:r>
             <a:r>
-              <a:rPr lang="en-US" sz="6000" dirty="0" spc="-2" kern="0">
+              <a:rPr lang="en-US" sz="6900" dirty="0" spc="0" kern="0">
                 <a:solidFill>
                   <a:srgbClr val="14161C"/>
                 </a:solidFill>
@@ -6935,7 +6924,7 @@
               </a:rPr>
               <a:t> container</a:t>
             </a:r>
-            <a:endParaRPr lang="en-US" sz="6000" dirty="0"/>
+            <a:endParaRPr lang="en-US" sz="6900" dirty="0"/>
           </a:p>
         </p:txBody>
       </p:sp>
@@ -8114,7 +8103,7 @@
         <p:spPr>
           <a:xfrm>
             <a:off x="914400" y="1333500"/>
-            <a:ext cx="16459200" cy="1143000"/>
+            <a:ext cx="16459200" cy="1047750"/>
           </a:xfrm>
           <a:prstGeom prst="rect">
             <a:avLst/>
@@ -8130,7 +8119,7 @@
               <a:buNone/>
             </a:pPr>
             <a:r>
-              <a:rPr lang="en-US" sz="6600" dirty="0" spc="-2" kern="0">
+              <a:rPr lang="en-US" sz="6900" dirty="0" spc="1" kern="0">
                 <a:solidFill>
                   <a:srgbClr val="F3EEE3"/>
                 </a:solidFill>
@@ -8141,7 +8130,7 @@
               <a:t>Container</a:t>
             </a:r>
             <a:r>
-              <a:rPr lang="en-US" sz="6600" dirty="0" spc="8" kern="0">
+              <a:rPr lang="en-US" sz="6900" dirty="0" spc="9" kern="0">
                 <a:solidFill>
                   <a:srgbClr val="F3EEE3"/>
                 </a:solidFill>
@@ -8152,7 +8141,7 @@
               <a:t> chết:</a:t>
             </a:r>
             <a:r>
-              <a:rPr lang="en-US" sz="6600" dirty="0" spc="-1" kern="0">
+              <a:rPr lang="en-US" sz="6900" dirty="0" spc="3" kern="0">
                 <a:solidFill>
                   <a:srgbClr val="F3EEE3"/>
                 </a:solidFill>
@@ -8163,7 +8152,7 @@
               <a:t> hai</a:t>
             </a:r>
             <a:r>
-              <a:rPr lang="en-US" sz="6600" dirty="0" spc="-21" kern="0">
+              <a:rPr lang="en-US" sz="6900" dirty="0" spc="-18" kern="0">
                 <a:solidFill>
                   <a:srgbClr val="F3EEE3"/>
                 </a:solidFill>
@@ -8174,7 +8163,7 @@
               <a:t> tên</a:t>
             </a:r>
             <a:r>
-              <a:rPr lang="en-US" sz="6600" dirty="0" spc="0" kern="0">
+              <a:rPr lang="en-US" sz="6900" dirty="0" spc="0" kern="0">
                 <a:solidFill>
                   <a:srgbClr val="F3EEE3"/>
                 </a:solidFill>
@@ -8185,7 +8174,7 @@
               <a:t> hay</a:t>
             </a:r>
             <a:r>
-              <a:rPr lang="en-US" sz="6600" dirty="0" spc="-16" kern="0">
+              <a:rPr lang="en-US" sz="6900" dirty="0" spc="-16" kern="0">
                 <a:solidFill>
                   <a:srgbClr val="F3EEE3"/>
                 </a:solidFill>
@@ -8195,7 +8184,7 @@
               </a:rPr>
               <a:t> gặp</a:t>
             </a:r>
-            <a:endParaRPr lang="en-US" sz="6600" dirty="0"/>
+            <a:endParaRPr lang="en-US" sz="6900" dirty="0"/>
           </a:p>
         </p:txBody>
       </p:sp>
@@ -9513,7 +9502,7 @@
         <p:spPr>
           <a:xfrm>
             <a:off x="914400" y="1333500"/>
-            <a:ext cx="16459200" cy="1143000"/>
+            <a:ext cx="16459200" cy="1047750"/>
           </a:xfrm>
           <a:prstGeom prst="rect">
             <a:avLst/>
@@ -9529,7 +9518,7 @@
               <a:buNone/>
             </a:pPr>
             <a:r>
-              <a:rPr lang="en-US" sz="6600" dirty="0" spc="2" kern="0">
+              <a:rPr lang="en-US" sz="6900" dirty="0" spc="5" kern="0">
                 <a:solidFill>
                   <a:srgbClr val="14161C"/>
                 </a:solidFill>
@@ -9540,7 +9529,7 @@
               <a:t>Chạy</a:t>
             </a:r>
             <a:r>
-              <a:rPr lang="en-US" sz="6600" dirty="0" spc="-18" kern="0">
+              <a:rPr lang="en-US" sz="6900" dirty="0" spc="-21" kern="0">
                 <a:solidFill>
                   <a:srgbClr val="14161C"/>
                 </a:solidFill>
@@ -9551,7 +9540,7 @@
               <a:t> rồi,</a:t>
             </a:r>
             <a:r>
-              <a:rPr lang="en-US" sz="6600" dirty="0" spc="5" kern="0">
+              <a:rPr lang="en-US" sz="6900" dirty="0" spc="8" kern="0">
                 <a:solidFill>
                   <a:srgbClr val="14161C"/>
                 </a:solidFill>
@@ -9562,7 +9551,7 @@
               <a:t> nhưng</a:t>
             </a:r>
             <a:r>
-              <a:rPr lang="en-US" sz="6600" dirty="0" spc="-45" kern="0">
+              <a:rPr lang="en-US" sz="6900" dirty="0" spc="-48" kern="0">
                 <a:solidFill>
                   <a:srgbClr val="14161C"/>
                 </a:solidFill>
@@ -9573,7 +9562,7 @@
               <a:t> chưa</a:t>
             </a:r>
             <a:r>
-              <a:rPr lang="en-US" sz="6600" dirty="0" spc="-2" kern="0">
+              <a:rPr lang="en-US" sz="6900" dirty="0" spc="1" kern="0">
                 <a:solidFill>
                   <a:srgbClr val="14161C"/>
                 </a:solidFill>
@@ -9584,7 +9573,7 @@
               <a:t> nhận</a:t>
             </a:r>
             <a:r>
-              <a:rPr lang="en-US" sz="6600" dirty="0" spc="-19" kern="0">
+              <a:rPr lang="en-US" sz="6900" dirty="0" spc="-19" kern="0">
                 <a:solidFill>
                   <a:srgbClr val="14161C"/>
                 </a:solidFill>
@@ -9594,7 +9583,7 @@
               </a:rPr>
               <a:t> traffic</a:t>
             </a:r>
-            <a:endParaRPr lang="en-US" sz="6600" dirty="0"/>
+            <a:endParaRPr lang="en-US" sz="6900" dirty="0"/>
           </a:p>
         </p:txBody>
       </p:sp>
@@ -13772,7 +13761,7 @@
               <a:buNone/>
             </a:pPr>
             <a:r>
-              <a:rPr lang="en-US" sz="6000" dirty="0" spc="-10" kern="0">
+              <a:rPr lang="en-US" sz="6900" dirty="0" spc="-6" kern="0">
                 <a:solidFill>
                   <a:srgbClr val="14161C"/>
                 </a:solidFill>
@@ -13783,7 +13772,7 @@
               <a:t>Lệnh</a:t>
             </a:r>
             <a:r>
-              <a:rPr lang="en-US" sz="6000" dirty="0" spc="15" kern="0">
+              <a:rPr lang="en-US" sz="6900" dirty="0" spc="18" kern="0">
                 <a:solidFill>
                   <a:srgbClr val="14161C"/>
                 </a:solidFill>
@@ -13794,7 +13783,7 @@
               <a:t> để</a:t>
             </a:r>
             <a:r>
-              <a:rPr lang="en-US" sz="6000" dirty="0" spc="-70" kern="0">
+              <a:rPr lang="en-US" sz="6900" dirty="0" spc="-79" kern="0">
                 <a:solidFill>
                   <a:srgbClr val="14161C"/>
                 </a:solidFill>
@@ -13805,7 +13794,7 @@
               <a:t> xem</a:t>
             </a:r>
             <a:r>
-              <a:rPr lang="en-US" sz="6000" dirty="0" spc="5" kern="0">
+              <a:rPr lang="en-US" sz="6900" dirty="0" spc="8" kern="0">
                 <a:solidFill>
                   <a:srgbClr val="14161C"/>
                 </a:solidFill>
@@ -13816,7 +13805,7 @@
               <a:t> từng</a:t>
             </a:r>
             <a:r>
-              <a:rPr lang="en-US" sz="6000" dirty="0" spc="-1" kern="0">
+              <a:rPr lang="en-US" sz="6900" dirty="0" spc="1" kern="0">
                 <a:solidFill>
                   <a:srgbClr val="14161C"/>
                 </a:solidFill>
@@ -13826,7 +13815,7 @@
               </a:rPr>
               <a:t> chặng</a:t>
             </a:r>
-            <a:endParaRPr lang="en-US" sz="6000" dirty="0"/>
+            <a:endParaRPr lang="en-US" sz="6900" dirty="0"/>
           </a:p>
         </p:txBody>
       </p:sp>

--- a/system-design-101/vi/lessons/sd-13-025/slides/sd-13-025.pptx
+++ b/system-design-101/vi/lessons/sd-13-025/slides/sd-13-025.pptx
@@ -2165,7 +2165,7 @@
               <a:buNone/>
             </a:pPr>
             <a:r>
-              <a:rPr lang="en-US" sz="2250" dirty="0" spc="4" kern="0">
+              <a:rPr lang="en-US" sz="2550" dirty="0" spc="8" kern="0">
                 <a:solidFill>
                   <a:srgbClr val="E4E1D8"/>
                 </a:solidFill>
@@ -2176,7 +2176,7 @@
               <a:t>Chưa</a:t>
             </a:r>
             <a:r>
-              <a:rPr lang="en-US" sz="2250" dirty="0" spc="5" kern="0">
+              <a:rPr lang="en-US" sz="2550" dirty="0" spc="0" kern="0">
                 <a:solidFill>
                   <a:srgbClr val="E4E1D8"/>
                 </a:solidFill>
@@ -2187,7 +2187,7 @@
               <a:t> có</a:t>
             </a:r>
             <a:r>
-              <a:rPr lang="en-US" sz="2250" dirty="0" spc="-2" kern="0">
+              <a:rPr lang="en-US" sz="2550" dirty="0" spc="-3" kern="0">
                 <a:solidFill>
                   <a:srgbClr val="E4E1D8"/>
                 </a:solidFill>
@@ -2197,7 +2197,7 @@
               </a:rPr>
               <a:t> node</a:t>
             </a:r>
-            <a:endParaRPr lang="en-US" sz="2250" dirty="0"/>
+            <a:endParaRPr lang="en-US" sz="2550" dirty="0"/>
           </a:p>
         </p:txBody>
       </p:sp>
@@ -2306,7 +2306,7 @@
               <a:buNone/>
             </a:pPr>
             <a:r>
-              <a:rPr lang="en-US" sz="2250" dirty="0" spc="4" kern="0">
+              <a:rPr lang="en-US" sz="2550" dirty="0" spc="8" kern="0">
                 <a:solidFill>
                   <a:srgbClr val="E4E1D8"/>
                 </a:solidFill>
@@ -2317,7 +2317,7 @@
               <a:t>Chưa</a:t>
             </a:r>
             <a:r>
-              <a:rPr lang="en-US" sz="2250" dirty="0" spc="1" kern="0">
+              <a:rPr lang="en-US" sz="2550" dirty="0" spc="0" kern="0">
                 <a:solidFill>
                   <a:srgbClr val="E4E1D8"/>
                 </a:solidFill>
@@ -2328,7 +2328,7 @@
               <a:t> khởi</a:t>
             </a:r>
             <a:r>
-              <a:rPr lang="en-US" sz="2250" dirty="0" spc="11" kern="0">
+              <a:rPr lang="en-US" sz="2550" dirty="0" spc="10" kern="0">
                 <a:solidFill>
                   <a:srgbClr val="E4E1D8"/>
                 </a:solidFill>
@@ -2339,7 +2339,7 @@
               <a:t> động</a:t>
             </a:r>
             <a:r>
-              <a:rPr lang="en-US" sz="2250" dirty="0" spc="-15" kern="0">
+              <a:rPr lang="en-US" sz="2550" dirty="0" spc="-15" kern="0">
                 <a:solidFill>
                   <a:srgbClr val="E4E1D8"/>
                 </a:solidFill>
@@ -2349,7 +2349,7 @@
               </a:rPr>
               <a:t> xong</a:t>
             </a:r>
-            <a:endParaRPr lang="en-US" sz="2250" dirty="0"/>
+            <a:endParaRPr lang="en-US" sz="2550" dirty="0"/>
           </a:p>
         </p:txBody>
       </p:sp>
@@ -2480,7 +2480,7 @@
               <a:buNone/>
             </a:pPr>
             <a:r>
-              <a:rPr lang="en-US" sz="2250" dirty="0" spc="-13" kern="0">
+              <a:rPr lang="en-US" sz="2550" dirty="0" spc="-11" kern="0">
                 <a:solidFill>
                   <a:srgbClr val="E4E1D8"/>
                 </a:solidFill>
@@ -2491,7 +2491,7 @@
               <a:t>Container</a:t>
             </a:r>
             <a:r>
-              <a:rPr lang="en-US" sz="2250" dirty="0" spc="-4" kern="0">
+              <a:rPr lang="en-US" sz="2550" dirty="0" spc="-4" kern="0">
                 <a:solidFill>
                   <a:srgbClr val="E4E1D8"/>
                 </a:solidFill>
@@ -2501,7 +2501,7 @@
               </a:rPr>
               <a:t> chết</a:t>
             </a:r>
-            <a:endParaRPr lang="en-US" sz="2250" dirty="0"/>
+            <a:endParaRPr lang="en-US" sz="2550" dirty="0"/>
           </a:p>
         </p:txBody>
       </p:sp>
@@ -2621,7 +2621,7 @@
               <a:buNone/>
             </a:pPr>
             <a:r>
-              <a:rPr lang="en-US" sz="2250" dirty="0" spc="-12" kern="0">
+              <a:rPr lang="en-US" sz="2550" dirty="0" spc="-9" kern="0">
                 <a:solidFill>
                   <a:srgbClr val="E4E1D8"/>
                 </a:solidFill>
@@ -2632,7 +2632,7 @@
               <a:t>Chạy</a:t>
             </a:r>
             <a:r>
-              <a:rPr lang="en-US" sz="2250" dirty="0" spc="-1" kern="0">
+              <a:rPr lang="en-US" sz="2550" dirty="0" spc="1" kern="0">
                 <a:solidFill>
                   <a:srgbClr val="E4E1D8"/>
                 </a:solidFill>
@@ -2643,7 +2643,7 @@
               <a:t> mà</a:t>
             </a:r>
             <a:r>
-              <a:rPr lang="en-US" sz="2250" dirty="0" spc="6" kern="0">
+              <a:rPr lang="en-US" sz="2550" dirty="0" spc="6" kern="0">
                 <a:solidFill>
                   <a:srgbClr val="E4E1D8"/>
                 </a:solidFill>
@@ -2654,7 +2654,7 @@
               <a:t> chưa</a:t>
             </a:r>
             <a:r>
-              <a:rPr lang="en-US" sz="2250" dirty="0" spc="-3" kern="0">
+              <a:rPr lang="en-US" sz="2550" dirty="0" spc="-7" kern="0">
                 <a:solidFill>
                   <a:srgbClr val="E4E1D8"/>
                 </a:solidFill>
@@ -2665,7 +2665,7 @@
               <a:t> sẵn</a:t>
             </a:r>
             <a:r>
-              <a:rPr lang="en-US" sz="2250" dirty="0" spc="-4" kern="0">
+              <a:rPr lang="en-US" sz="2550" dirty="0" spc="-6" kern="0">
                 <a:solidFill>
                   <a:srgbClr val="E4E1D8"/>
                 </a:solidFill>
@@ -2675,7 +2675,7 @@
               </a:rPr>
               <a:t> sàng</a:t>
             </a:r>
-            <a:endParaRPr lang="en-US" sz="2250" dirty="0"/>
+            <a:endParaRPr lang="en-US" sz="2550" dirty="0"/>
           </a:p>
         </p:txBody>
       </p:sp>
@@ -8367,7 +8367,7 @@
         <p:spPr>
           <a:xfrm>
             <a:off x="7143750" y="3667125"/>
-            <a:ext cx="9906000" cy="1333500"/>
+            <a:ext cx="9906000" cy="1457325"/>
           </a:xfrm>
           <a:prstGeom prst="rect">
             <a:avLst/>
@@ -8376,12 +8376,12 @@
           <a:ln/>
         </p:spPr>
         <p:txBody>
-          <a:bodyPr wrap="square" lIns="0" tIns="8557" rIns="0" bIns="-8557" rtlCol="0" anchor="t"/>
+          <a:bodyPr wrap="square" lIns="0" tIns="9700" rIns="0" bIns="-9700" rtlCol="0" anchor="t"/>
           <a:lstStyle/>
           <a:p>
-            <a:pPr algn="l" marL="285750" indent="-204151">
+            <a:pPr algn="l" marL="323850" indent="-231371">
               <a:lnSpc>
-                <a:spcPts val="3038"/>
+                <a:spcPts val="3443"/>
               </a:lnSpc>
               <a:spcAft>
                 <a:spcPts val="450"/>
@@ -8391,7 +8391,7 @@
               <a:buChar char="•"/>
             </a:pPr>
             <a:r>
-              <a:rPr lang="en-US" sz="2250" dirty="0" spc="0" kern="0">
+              <a:rPr lang="en-US" sz="2550" dirty="0" spc="0" kern="0">
                 <a:solidFill>
                   <a:srgbClr val="E4E1D8"/>
                 </a:solidFill>
@@ -8402,7 +8402,7 @@
               <a:t>Ứng</a:t>
             </a:r>
             <a:r>
-              <a:rPr lang="en-US" sz="2250" dirty="0" spc="3" kern="0">
+              <a:rPr lang="en-US" sz="2550" dirty="0" spc="-1" kern="0">
                 <a:solidFill>
                   <a:srgbClr val="E4E1D8"/>
                 </a:solidFill>
@@ -8413,7 +8413,7 @@
               <a:t> dụng</a:t>
             </a:r>
             <a:r>
-              <a:rPr lang="en-US" sz="2250" dirty="0" spc="-11" kern="0">
+              <a:rPr lang="en-US" sz="2550" dirty="0" spc="-9" kern="0">
                 <a:solidFill>
                   <a:srgbClr val="E4E1D8"/>
                 </a:solidFill>
@@ -8424,7 +8424,7 @@
               <a:t> thoát</a:t>
             </a:r>
             <a:r>
-              <a:rPr lang="en-US" sz="2250" dirty="0" spc="-1" kern="0">
+              <a:rPr lang="en-US" sz="2550" dirty="0" spc="-1" kern="0">
                 <a:solidFill>
                   <a:srgbClr val="E4E1D8"/>
                 </a:solidFill>
@@ -8435,7 +8435,7 @@
               <a:t> liên</a:t>
             </a:r>
             <a:r>
-              <a:rPr lang="en-US" sz="2250" dirty="0" spc="4" kern="0">
+              <a:rPr lang="en-US" sz="2550" dirty="0" spc="1" kern="0">
                 <a:solidFill>
                   <a:srgbClr val="E4E1D8"/>
                 </a:solidFill>
@@ -8445,12 +8445,12 @@
               </a:rPr>
               <a:t> tục.</a:t>
             </a:r>
-            <a:endParaRPr lang="en-US" sz="2250" dirty="0"/>
+            <a:endParaRPr lang="en-US" sz="2550" dirty="0"/>
           </a:p>
           <a:p>
-            <a:pPr algn="l" marL="285750" indent="-204151">
+            <a:pPr algn="l" marL="323850" indent="-231371">
               <a:lnSpc>
-                <a:spcPts val="3038"/>
+                <a:spcPts val="3443"/>
               </a:lnSpc>
               <a:spcAft>
                 <a:spcPts val="450"/>
@@ -8460,7 +8460,7 @@
               <a:buChar char="•"/>
             </a:pPr>
             <a:r>
-              <a:rPr lang="en-US" sz="2250" dirty="0" spc="-5" kern="0">
+              <a:rPr lang="en-US" sz="2550" dirty="0" spc="-3" kern="0">
                 <a:solidFill>
                   <a:srgbClr val="E4E1D8"/>
                 </a:solidFill>
@@ -8471,7 +8471,7 @@
               <a:t>kubelet</a:t>
             </a:r>
             <a:r>
-              <a:rPr lang="en-US" sz="2250" dirty="0" spc="0" kern="0">
+              <a:rPr lang="en-US" sz="2550" dirty="0" spc="0" kern="0">
                 <a:solidFill>
                   <a:srgbClr val="E4E1D8"/>
                 </a:solidFill>
@@ -8482,7 +8482,7 @@
               <a:t> khởi</a:t>
             </a:r>
             <a:r>
-              <a:rPr lang="en-US" sz="2250" dirty="0" spc="11" kern="0">
+              <a:rPr lang="en-US" sz="2550" dirty="0" spc="10" kern="0">
                 <a:solidFill>
                   <a:srgbClr val="E4E1D8"/>
                 </a:solidFill>
@@ -8493,7 +8493,7 @@
               <a:t> động</a:t>
             </a:r>
             <a:r>
-              <a:rPr lang="en-US" sz="2250" dirty="0" spc="-3" kern="0">
+              <a:rPr lang="en-US" sz="2550" dirty="0" spc="0" kern="0">
                 <a:solidFill>
                   <a:srgbClr val="E4E1D8"/>
                 </a:solidFill>
@@ -8501,10 +8501,10 @@
                 <a:ea typeface="Be Vietnam Pro" pitchFamily="34" charset="-122"/>
                 <a:cs typeface="Be Vietnam Pro" pitchFamily="34" charset="-120"/>
               </a:rPr>
-              <a:t> lại,</a:t>
-            </a:r>
-            <a:r>
-              <a:rPr lang="en-US" sz="2250" dirty="0" spc="1" kern="0">
+              <a:t> lại, thời</a:t>
+            </a:r>
+            <a:r>
+              <a:rPr lang="en-US" sz="2550" dirty="0" spc="-1" kern="0">
                 <a:solidFill>
                   <a:srgbClr val="E4E1D8"/>
                 </a:solidFill>
@@ -8512,10 +8512,10 @@
                 <a:ea typeface="Be Vietnam Pro" pitchFamily="34" charset="-122"/>
                 <a:cs typeface="Be Vietnam Pro" pitchFamily="34" charset="-120"/>
               </a:rPr>
-              <a:t> thời</a:t>
-            </a:r>
-            <a:r>
-              <a:rPr lang="en-US" sz="2250" dirty="0" spc="-2" kern="0">
+              <a:t> gian</a:t>
+            </a:r>
+            <a:r>
+              <a:rPr lang="en-US" sz="2550" dirty="0" spc="0" kern="0">
                 <a:solidFill>
                   <a:srgbClr val="E4E1D8"/>
                 </a:solidFill>
@@ -8523,10 +8523,10 @@
                 <a:ea typeface="Be Vietnam Pro" pitchFamily="34" charset="-122"/>
                 <a:cs typeface="Be Vietnam Pro" pitchFamily="34" charset="-120"/>
               </a:rPr>
-              <a:t> gian</a:t>
-            </a:r>
-            <a:r>
-              <a:rPr lang="en-US" sz="2250" dirty="0" spc="3" kern="0">
+              <a:t> chờ</a:t>
+            </a:r>
+            <a:r>
+              <a:rPr lang="en-US" sz="2550" dirty="0" spc="-9" kern="0">
                 <a:solidFill>
                   <a:srgbClr val="E4E1D8"/>
                 </a:solidFill>
@@ -8534,10 +8534,10 @@
                 <a:ea typeface="Be Vietnam Pro" pitchFamily="34" charset="-122"/>
                 <a:cs typeface="Be Vietnam Pro" pitchFamily="34" charset="-120"/>
               </a:rPr>
-              <a:t> chờ</a:t>
-            </a:r>
-            <a:r>
-              <a:rPr lang="en-US" sz="2250" dirty="0" spc="-9" kern="0">
+              <a:t> tăng</a:t>
+            </a:r>
+            <a:r>
+              <a:rPr lang="en-US" sz="2550" dirty="0" spc="1" kern="0">
                 <a:solidFill>
                   <a:srgbClr val="E4E1D8"/>
                 </a:solidFill>
@@ -8545,32 +8545,21 @@
                 <a:ea typeface="Be Vietnam Pro" pitchFamily="34" charset="-122"/>
                 <a:cs typeface="Be Vietnam Pro" pitchFamily="34" charset="-120"/>
               </a:rPr>
-              <a:t> tăng</a:t>
-            </a:r>
-            <a:r>
-              <a:rPr lang="en-US" sz="2250" dirty="0" spc="2" kern="0">
-                <a:solidFill>
-                  <a:srgbClr val="E4E1D8"/>
-                </a:solidFill>
-                <a:latin typeface="Be Vietnam Pro" pitchFamily="34" charset="0"/>
-                <a:ea typeface="Be Vietnam Pro" pitchFamily="34" charset="-122"/>
-                <a:cs typeface="Be Vietnam Pro" pitchFamily="34" charset="-120"/>
-              </a:rPr>
               <a:t> dần.</a:t>
             </a:r>
-            <a:endParaRPr lang="en-US" sz="2250" dirty="0"/>
+            <a:endParaRPr lang="en-US" sz="2550" dirty="0"/>
           </a:p>
           <a:p>
-            <a:pPr algn="l" marL="285750" indent="-204151">
+            <a:pPr algn="l" marL="323850" indent="-231371">
               <a:lnSpc>
-                <a:spcPts val="3038"/>
+                <a:spcPts val="3443"/>
               </a:lnSpc>
               <a:buSzPct val="100000"/>
               <a:buFont typeface="Arial"/>
               <a:buChar char="•"/>
             </a:pPr>
             <a:r>
-              <a:rPr lang="en-US" sz="2250" dirty="0" spc="-34" kern="0">
+              <a:rPr lang="en-US" sz="2550" dirty="0" spc="-33" kern="0">
                 <a:solidFill>
                   <a:srgbClr val="E4E1D8"/>
                 </a:solidFill>
@@ -8581,7 +8570,7 @@
               <a:t>Xem</a:t>
             </a:r>
             <a:r>
-              <a:rPr lang="en-US" sz="2250" dirty="0" spc="-11" kern="0">
+              <a:rPr lang="en-US" sz="2550" dirty="0" spc="-12" kern="0">
                 <a:solidFill>
                   <a:srgbClr val="E4E1D8"/>
                 </a:solidFill>
@@ -8592,7 +8581,7 @@
               <a:t> nguyên</a:t>
             </a:r>
             <a:r>
-              <a:rPr lang="en-US" sz="2250" dirty="0" spc="1" kern="0">
+              <a:rPr lang="en-US" sz="2550" dirty="0" spc="1" kern="0">
                 <a:solidFill>
                   <a:srgbClr val="E4E1D8"/>
                 </a:solidFill>
@@ -8603,7 +8592,7 @@
               <a:t> nhân:</a:t>
             </a:r>
             <a:r>
-              <a:rPr lang="en-US" sz="2250" dirty="0" spc="-2" kern="0">
+              <a:rPr lang="en-US" sz="2550" dirty="0" spc="-4" kern="0">
                 <a:solidFill>
                   <a:srgbClr val="E4E1D8"/>
                 </a:solidFill>
@@ -8614,7 +8603,7 @@
               <a:t> logs</a:t>
             </a:r>
             <a:r>
-              <a:rPr lang="en-US" sz="2250" dirty="0" spc="-11" kern="0">
+              <a:rPr lang="en-US" sz="2550" dirty="0" spc="-13" kern="0">
                 <a:solidFill>
                   <a:srgbClr val="E4E1D8"/>
                 </a:solidFill>
@@ -8624,7 +8613,7 @@
               </a:rPr>
               <a:t> --previous.</a:t>
             </a:r>
-            <a:endParaRPr lang="en-US" sz="2250" dirty="0"/>
+            <a:endParaRPr lang="en-US" sz="2550" dirty="0"/>
           </a:p>
         </p:txBody>
       </p:sp>
@@ -8712,12 +8701,12 @@
           <a:ln/>
         </p:spPr>
         <p:txBody>
-          <a:bodyPr wrap="square" lIns="0" tIns="5334" rIns="0" bIns="-5334" rtlCol="0" anchor="t"/>
+          <a:bodyPr wrap="square" lIns="0" tIns="5667" rIns="0" bIns="-5667" rtlCol="0" anchor="t"/>
           <a:lstStyle/>
           <a:p>
-            <a:pPr algn="l" marL="304800" indent="-217761">
+            <a:pPr algn="l" marL="323850" indent="-231371">
               <a:lnSpc>
-                <a:spcPts val="3360"/>
+                <a:spcPts val="3570"/>
               </a:lnSpc>
               <a:spcAft>
                 <a:spcPts val="450"/>
@@ -8727,7 +8716,7 @@
               <a:buChar char="•"/>
             </a:pPr>
             <a:r>
-              <a:rPr lang="en-US" sz="2400" dirty="0" spc="-10" kern="0">
+              <a:rPr lang="en-US" sz="2550" dirty="0" spc="-11" kern="0">
                 <a:solidFill>
                   <a:srgbClr val="E4E1D8"/>
                 </a:solidFill>
@@ -8738,7 +8727,7 @@
               <a:t>Container</a:t>
             </a:r>
             <a:r>
-              <a:rPr lang="en-US" sz="2400" dirty="0" spc="7" kern="0">
+              <a:rPr lang="en-US" sz="2550" dirty="0" spc="6" kern="0">
                 <a:solidFill>
                   <a:srgbClr val="E4E1D8"/>
                 </a:solidFill>
@@ -8749,7 +8738,7 @@
               <a:t> vượt</a:t>
             </a:r>
             <a:r>
-              <a:rPr lang="en-US" sz="2400" dirty="0" spc="-1" kern="0">
+              <a:rPr lang="en-US" sz="2550" dirty="0" spc="-1" kern="0">
                 <a:solidFill>
                   <a:srgbClr val="E4E1D8"/>
                 </a:solidFill>
@@ -8760,7 +8749,7 @@
               <a:t> limits</a:t>
             </a:r>
             <a:r>
-              <a:rPr lang="en-US" sz="2400" dirty="0" spc="-2" kern="0">
+              <a:rPr lang="en-US" sz="2550" dirty="0" spc="-4" kern="0">
                 <a:solidFill>
                   <a:srgbClr val="E4E1D8"/>
                 </a:solidFill>
@@ -8771,7 +8760,7 @@
               <a:t> bộ</a:t>
             </a:r>
             <a:r>
-              <a:rPr lang="en-US" sz="2400" dirty="0" spc="1" kern="0">
+              <a:rPr lang="en-US" sz="2550" dirty="0" spc="-1" kern="0">
                 <a:solidFill>
                   <a:srgbClr val="E4E1D8"/>
                 </a:solidFill>
@@ -8779,10 +8768,10 @@
                 <a:ea typeface="Be Vietnam Pro" pitchFamily="34" charset="-122"/>
                 <a:cs typeface="Be Vietnam Pro" pitchFamily="34" charset="-120"/>
               </a:rPr>
-              <a:t> nhớ</a:t>
-            </a:r>
-            <a:r>
-              <a:rPr lang="en-US" sz="2400" dirty="0" spc="2" kern="0">
+              <a:t> nhớ của</a:t>
+            </a:r>
+            <a:r>
+              <a:rPr lang="en-US" sz="2550" dirty="0" spc="0" kern="0">
                 <a:solidFill>
                   <a:srgbClr val="E4E1D8"/>
                 </a:solidFill>
@@ -8790,36 +8779,14 @@
                 <a:ea typeface="Be Vietnam Pro" pitchFamily="34" charset="-122"/>
                 <a:cs typeface="Be Vietnam Pro" pitchFamily="34" charset="-120"/>
               </a:rPr>
-              <a:t> của</a:t>
-            </a:r>
-            <a:r>
-              <a:rPr lang="en-US" sz="2400" dirty="0" spc="-1" kern="0">
-                <a:solidFill>
-                  <a:srgbClr val="E4E1D8"/>
-                </a:solidFill>
-                <a:latin typeface="Be Vietnam Pro" pitchFamily="34" charset="0"/>
-                <a:ea typeface="Be Vietnam Pro" pitchFamily="34" charset="-122"/>
-                <a:cs typeface="Be Vietnam Pro" pitchFamily="34" charset="-120"/>
-              </a:rPr>
-              <a:t> chính</a:t>
-            </a:r>
-            <a:r>
-              <a:rPr lang="en-US" sz="2400" dirty="0" spc="2" kern="0">
-                <a:solidFill>
-                  <a:srgbClr val="E4E1D8"/>
-                </a:solidFill>
-                <a:latin typeface="Be Vietnam Pro" pitchFamily="34" charset="0"/>
-                <a:ea typeface="Be Vietnam Pro" pitchFamily="34" charset="-122"/>
-                <a:cs typeface="Be Vietnam Pro" pitchFamily="34" charset="-120"/>
-              </a:rPr>
-              <a:t> nó.</a:t>
-            </a:r>
-            <a:endParaRPr lang="en-US" sz="2400" dirty="0"/>
+              <a:t> chính nó.</a:t>
+            </a:r>
+            <a:endParaRPr lang="en-US" sz="2550" dirty="0"/>
           </a:p>
           <a:p>
-            <a:pPr algn="l" marL="304800" indent="-217761">
+            <a:pPr algn="l" marL="323850" indent="-231371">
               <a:lnSpc>
-                <a:spcPts val="3360"/>
+                <a:spcPts val="3570"/>
               </a:lnSpc>
               <a:spcAft>
                 <a:spcPts val="450"/>
@@ -8829,7 +8796,7 @@
               <a:buChar char="•"/>
             </a:pPr>
             <a:r>
-              <a:rPr lang="en-US" sz="2400" dirty="0" spc="-2" kern="0">
+              <a:rPr lang="en-US" sz="2550" dirty="0" spc="-4" kern="0">
                 <a:solidFill>
                   <a:srgbClr val="E4E1D8"/>
                 </a:solidFill>
@@ -8840,7 +8807,7 @@
               <a:t>Hoặc</a:t>
             </a:r>
             <a:r>
-              <a:rPr lang="en-US" sz="2400" dirty="0" spc="0" kern="0">
+              <a:rPr lang="en-US" sz="2550" dirty="0" spc="-2" kern="0">
                 <a:solidFill>
                   <a:srgbClr val="E4E1D8"/>
                 </a:solidFill>
@@ -8851,7 +8818,7 @@
               <a:t> node</a:t>
             </a:r>
             <a:r>
-              <a:rPr lang="en-US" sz="2400" dirty="0" spc="-6" kern="0">
+              <a:rPr lang="en-US" sz="2550" dirty="0" spc="-5" kern="0">
                 <a:solidFill>
                   <a:srgbClr val="E4E1D8"/>
                 </a:solidFill>
@@ -8859,10 +8826,10 @@
                 <a:ea typeface="Be Vietnam Pro" pitchFamily="34" charset="-122"/>
                 <a:cs typeface="Be Vietnam Pro" pitchFamily="34" charset="-120"/>
               </a:rPr>
-              <a:t> hết</a:t>
-            </a:r>
-            <a:r>
-              <a:rPr lang="en-US" sz="2400" dirty="0" spc="-2" kern="0">
+              <a:t> hết bộ</a:t>
+            </a:r>
+            <a:r>
+              <a:rPr lang="en-US" sz="2550" dirty="0" spc="0" kern="0">
                 <a:solidFill>
                   <a:srgbClr val="E4E1D8"/>
                 </a:solidFill>
@@ -8870,32 +8837,21 @@
                 <a:ea typeface="Be Vietnam Pro" pitchFamily="34" charset="-122"/>
                 <a:cs typeface="Be Vietnam Pro" pitchFamily="34" charset="-120"/>
               </a:rPr>
-              <a:t> bộ</a:t>
-            </a:r>
-            <a:r>
-              <a:rPr lang="en-US" sz="2400" dirty="0" spc="1" kern="0">
-                <a:solidFill>
-                  <a:srgbClr val="E4E1D8"/>
-                </a:solidFill>
-                <a:latin typeface="Be Vietnam Pro" pitchFamily="34" charset="0"/>
-                <a:ea typeface="Be Vietnam Pro" pitchFamily="34" charset="-122"/>
-                <a:cs typeface="Be Vietnam Pro" pitchFamily="34" charset="-120"/>
-              </a:rPr>
               <a:t> nhớ.</a:t>
             </a:r>
-            <a:endParaRPr lang="en-US" sz="2400" dirty="0"/>
+            <a:endParaRPr lang="en-US" sz="2550" dirty="0"/>
           </a:p>
           <a:p>
-            <a:pPr algn="l" marL="304800" indent="-217761">
+            <a:pPr algn="l" marL="323850" indent="-231371">
               <a:lnSpc>
-                <a:spcPts val="3360"/>
+                <a:spcPts val="3570"/>
               </a:lnSpc>
               <a:buSzPct val="100000"/>
               <a:buFont typeface="Arial"/>
               <a:buChar char="•"/>
             </a:pPr>
             <a:r>
-              <a:rPr lang="en-US" sz="2400" dirty="0" spc="6" kern="0">
+              <a:rPr lang="en-US" sz="2550" dirty="0" spc="5" kern="0">
                 <a:solidFill>
                   <a:srgbClr val="E4E1D8"/>
                 </a:solidFill>
@@ -8906,7 +8862,7 @@
               <a:t>Thường</a:t>
             </a:r>
             <a:r>
-              <a:rPr lang="en-US" sz="2400" dirty="0" spc="-27" kern="0">
+              <a:rPr lang="en-US" sz="2550" dirty="0" spc="-28" kern="0">
                 <a:solidFill>
                   <a:srgbClr val="E4E1D8"/>
                 </a:solidFill>
@@ -8917,7 +8873,7 @@
               <a:t> kèm</a:t>
             </a:r>
             <a:r>
-              <a:rPr lang="en-US" sz="2400" dirty="0" spc="4" kern="0">
+              <a:rPr lang="en-US" sz="2550" dirty="0" spc="2" kern="0">
                 <a:solidFill>
                   <a:srgbClr val="E4E1D8"/>
                 </a:solidFill>
@@ -8928,7 +8884,7 @@
               <a:t> mã</a:t>
             </a:r>
             <a:r>
-              <a:rPr lang="en-US" sz="2400" dirty="0" spc="-7" kern="0">
+              <a:rPr lang="en-US" sz="2550" dirty="0" spc="-9" kern="0">
                 <a:solidFill>
                   <a:srgbClr val="E4E1D8"/>
                 </a:solidFill>
@@ -8939,7 +8895,7 @@
               <a:t> thoát</a:t>
             </a:r>
             <a:r>
-              <a:rPr lang="en-US" sz="2400" dirty="0" spc="-1" kern="0">
+              <a:rPr lang="en-US" sz="2550" dirty="0" spc="-1" kern="0">
                 <a:solidFill>
                   <a:srgbClr val="E4E1D8"/>
                 </a:solidFill>
@@ -8949,7 +8905,7 @@
               </a:rPr>
               <a:t> 137.</a:t>
             </a:r>
-            <a:endParaRPr lang="en-US" sz="2400" dirty="0"/>
+            <a:endParaRPr lang="en-US" sz="2550" dirty="0"/>
           </a:p>
         </p:txBody>
       </p:sp>
@@ -10261,17 +10217,17 @@
           <a:ln/>
         </p:spPr>
         <p:txBody>
-          <a:bodyPr wrap="square" lIns="0" tIns="6413" rIns="0" bIns="-6413" rtlCol="0" anchor="t"/>
+          <a:bodyPr wrap="square" lIns="0" tIns="7271" rIns="0" bIns="-7271" rtlCol="0" anchor="t"/>
           <a:lstStyle/>
           <a:p>
             <a:pPr algn="l" indent="0" marL="0">
               <a:lnSpc>
-                <a:spcPts val="3038"/>
+                <a:spcPts val="3443"/>
               </a:lnSpc>
               <a:buNone/>
             </a:pPr>
             <a:r>
-              <a:rPr lang="en-US" sz="2250" b="1" dirty="0" kern="0">
+              <a:rPr lang="en-US" sz="2550" b="1" dirty="0" spc="5" kern="0">
                 <a:solidFill>
                   <a:srgbClr val="7C93FF"/>
                 </a:solidFill>
@@ -10281,7 +10237,7 @@
               </a:rPr>
               <a:t>kubectl describe pod</a:t>
             </a:r>
-            <a:endParaRPr lang="en-US" sz="2250" dirty="0"/>
+            <a:endParaRPr lang="en-US" sz="2550" dirty="0"/>
           </a:p>
         </p:txBody>
       </p:sp>
@@ -10303,17 +10259,17 @@
           <a:ln/>
         </p:spPr>
         <p:txBody>
-          <a:bodyPr wrap="square" lIns="0" tIns="5334" rIns="0" bIns="-5334" rtlCol="0" anchor="t"/>
+          <a:bodyPr wrap="square" lIns="0" tIns="5667" rIns="0" bIns="-5667" rtlCol="0" anchor="t"/>
           <a:lstStyle/>
           <a:p>
             <a:pPr algn="l" indent="0" marL="0">
               <a:lnSpc>
-                <a:spcPts val="3360"/>
+                <a:spcPts val="3570"/>
               </a:lnSpc>
               <a:buNone/>
             </a:pPr>
             <a:r>
-              <a:rPr lang="en-US" sz="2400" dirty="0" spc="0" kern="0">
+              <a:rPr lang="en-US" sz="2550" dirty="0" spc="1" kern="0">
                 <a:solidFill>
                   <a:srgbClr val="F3EEE3"/>
                 </a:solidFill>
@@ -10324,7 +10280,7 @@
               <a:t>Phần</a:t>
             </a:r>
             <a:r>
-              <a:rPr lang="en-US" sz="2400" dirty="0" spc="-15" kern="0">
+              <a:rPr lang="en-US" sz="2550" dirty="0" spc="-15" kern="0">
                 <a:solidFill>
                   <a:srgbClr val="F3EEE3"/>
                 </a:solidFill>
@@ -10335,7 +10291,7 @@
               <a:t> Events</a:t>
             </a:r>
             <a:r>
-              <a:rPr lang="en-US" sz="2400" dirty="0" spc="1" kern="0">
+              <a:rPr lang="en-US" sz="2550" dirty="0" spc="0" kern="0">
                 <a:solidFill>
                   <a:srgbClr val="F3EEE3"/>
                 </a:solidFill>
@@ -10346,7 +10302,7 @@
               <a:t> cho</a:t>
             </a:r>
             <a:r>
-              <a:rPr lang="en-US" sz="2400" dirty="0" spc="-5" kern="0">
+              <a:rPr lang="en-US" sz="2550" dirty="0" spc="-4" kern="0">
                 <a:solidFill>
                   <a:srgbClr val="F3EEE3"/>
                 </a:solidFill>
@@ -10357,7 +10313,7 @@
               <a:t> biết</a:t>
             </a:r>
             <a:r>
-              <a:rPr lang="en-US" sz="2400" dirty="0" spc="2" kern="0">
+              <a:rPr lang="en-US" sz="2550" dirty="0" spc="0" kern="0">
                 <a:solidFill>
                   <a:srgbClr val="F3EEE3"/>
                 </a:solidFill>
@@ -10368,7 +10324,7 @@
               <a:t> chặng</a:t>
             </a:r>
             <a:r>
-              <a:rPr lang="en-US" sz="2400" dirty="0" spc="1" kern="0">
+              <a:rPr lang="en-US" sz="2550" dirty="0" spc="1" kern="0">
                 <a:solidFill>
                   <a:srgbClr val="F3EEE3"/>
                 </a:solidFill>
@@ -10378,7 +10334,7 @@
               </a:rPr>
               <a:t> nào.</a:t>
             </a:r>
-            <a:endParaRPr lang="en-US" sz="2400" dirty="0"/>
+            <a:endParaRPr lang="en-US" sz="2550" dirty="0"/>
           </a:p>
         </p:txBody>
       </p:sp>
@@ -12485,17 +12441,17 @@
           <a:ln/>
         </p:spPr>
         <p:txBody>
-          <a:bodyPr wrap="square" lIns="0" tIns="6413" rIns="0" bIns="-6413" rtlCol="0" anchor="t"/>
+          <a:bodyPr wrap="square" lIns="0" tIns="7271" rIns="0" bIns="-7271" rtlCol="0" anchor="t"/>
           <a:lstStyle/>
           <a:p>
             <a:pPr algn="l" indent="0" marL="0">
               <a:lnSpc>
-                <a:spcPts val="3038"/>
+                <a:spcPts val="3443"/>
               </a:lnSpc>
               <a:buNone/>
             </a:pPr>
             <a:r>
-              <a:rPr lang="en-US" sz="2250" b="1" dirty="0" kern="0">
+              <a:rPr lang="en-US" sz="2550" b="1" dirty="0" spc="5" kern="0">
                 <a:solidFill>
                   <a:srgbClr val="B45309"/>
                 </a:solidFill>
@@ -12505,7 +12461,7 @@
               </a:rPr>
               <a:t>nodes are available: 3 Insufficient memory</a:t>
             </a:r>
-            <a:endParaRPr lang="en-US" sz="2250" dirty="0"/>
+            <a:endParaRPr lang="en-US" sz="2550" dirty="0"/>
           </a:p>
         </p:txBody>
       </p:sp>
@@ -12767,12 +12723,12 @@
           <a:ln/>
         </p:spPr>
         <p:txBody>
-          <a:bodyPr wrap="square" lIns="0" tIns="5501" rIns="0" bIns="-5501" rtlCol="0" anchor="t"/>
+          <a:bodyPr wrap="square" lIns="0" tIns="5667" rIns="0" bIns="-5667" rtlCol="0" anchor="t"/>
           <a:lstStyle/>
           <a:p>
-            <a:pPr algn="l" marL="314325" indent="-224566">
+            <a:pPr algn="l" marL="323850" indent="-231371">
               <a:lnSpc>
-                <a:spcPts val="3465"/>
+                <a:spcPts val="3570"/>
               </a:lnSpc>
               <a:spcAft>
                 <a:spcPts val="1200"/>
@@ -12782,7 +12738,7 @@
               <a:buChar char="•"/>
             </a:pPr>
             <a:r>
-              <a:rPr lang="en-US" sz="2475" dirty="0" spc="1" kern="0">
+              <a:rPr lang="en-US" sz="2550" dirty="0" spc="0" kern="0">
                 <a:solidFill>
                   <a:srgbClr val="14161C"/>
                 </a:solidFill>
@@ -12793,7 +12749,7 @@
               <a:t>Giảm</a:t>
             </a:r>
             <a:r>
-              <a:rPr lang="en-US" sz="2475" dirty="0" spc="-19" kern="0">
+              <a:rPr lang="en-US" sz="2550" dirty="0" spc="-15" kern="0">
                 <a:solidFill>
                   <a:srgbClr val="14161C"/>
                 </a:solidFill>
@@ -12804,7 +12760,7 @@
               <a:t> requests</a:t>
             </a:r>
             <a:r>
-              <a:rPr lang="en-US" sz="2475" dirty="0" spc="0" kern="0">
+              <a:rPr lang="en-US" sz="2550" dirty="0" spc="1" kern="0">
                 <a:solidFill>
                   <a:srgbClr val="14161C"/>
                 </a:solidFill>
@@ -12815,7 +12771,7 @@
               <a:t> nếu</a:t>
             </a:r>
             <a:r>
-              <a:rPr lang="en-US" sz="2475" dirty="0" spc="1" kern="0">
+              <a:rPr lang="en-US" sz="2550" dirty="0" spc="0" kern="0">
                 <a:solidFill>
                   <a:srgbClr val="14161C"/>
                 </a:solidFill>
@@ -12826,7 +12782,7 @@
               <a:t> khai</a:t>
             </a:r>
             <a:r>
-              <a:rPr lang="en-US" sz="2475" dirty="0" spc="-1" kern="0">
+              <a:rPr lang="en-US" sz="2550" dirty="0" spc="2" kern="0">
                 <a:solidFill>
                   <a:srgbClr val="14161C"/>
                 </a:solidFill>
@@ -12837,7 +12793,7 @@
               <a:t> quá</a:t>
             </a:r>
             <a:r>
-              <a:rPr lang="en-US" sz="2475" dirty="0" spc="-18" kern="0">
+              <a:rPr lang="en-US" sz="2550" dirty="0" spc="-17" kern="0">
                 <a:solidFill>
                   <a:srgbClr val="14161C"/>
                 </a:solidFill>
@@ -12847,12 +12803,12 @@
               </a:rPr>
               <a:t> tay.</a:t>
             </a:r>
-            <a:endParaRPr lang="en-US" sz="2475" dirty="0"/>
+            <a:endParaRPr lang="en-US" sz="2550" dirty="0"/>
           </a:p>
           <a:p>
-            <a:pPr algn="l" marL="314325" indent="-224566">
+            <a:pPr algn="l" marL="323850" indent="-231371">
               <a:lnSpc>
-                <a:spcPts val="3465"/>
+                <a:spcPts val="3570"/>
               </a:lnSpc>
               <a:spcAft>
                 <a:spcPts val="1200"/>
@@ -12862,7 +12818,7 @@
               <a:buChar char="•"/>
             </a:pPr>
             <a:r>
-              <a:rPr lang="en-US" sz="2475" dirty="0" spc="-1" kern="0">
+              <a:rPr lang="en-US" sz="2550" dirty="0" spc="0" kern="0">
                 <a:solidFill>
                   <a:srgbClr val="14161C"/>
                 </a:solidFill>
@@ -12873,29 +12829,18 @@
               <a:t>Thêm</a:t>
             </a:r>
             <a:r>
-              <a:rPr lang="en-US" sz="2475" dirty="0" spc="-13" kern="0">
-                <a:solidFill>
-                  <a:srgbClr val="14161C"/>
-                </a:solidFill>
-                <a:latin typeface="Be Vietnam Pro" pitchFamily="34" charset="0"/>
-                <a:ea typeface="Be Vietnam Pro" pitchFamily="34" charset="-122"/>
-                <a:cs typeface="Be Vietnam Pro" pitchFamily="34" charset="-120"/>
-              </a:rPr>
-              <a:t> tài</a:t>
-            </a:r>
-            <a:r>
-              <a:rPr lang="en-US" sz="2475" dirty="0" spc="-11" kern="0">
-                <a:solidFill>
-                  <a:srgbClr val="14161C"/>
-                </a:solidFill>
-                <a:latin typeface="Be Vietnam Pro" pitchFamily="34" charset="0"/>
-                <a:ea typeface="Be Vietnam Pro" pitchFamily="34" charset="-122"/>
-                <a:cs typeface="Be Vietnam Pro" pitchFamily="34" charset="-120"/>
-              </a:rPr>
-              <a:t> nguyên</a:t>
-            </a:r>
-            <a:r>
-              <a:rPr lang="en-US" sz="2475" dirty="0" spc="1" kern="0">
+              <a:rPr lang="en-US" sz="2550" dirty="0" spc="-12" kern="0">
+                <a:solidFill>
+                  <a:srgbClr val="14161C"/>
+                </a:solidFill>
+                <a:latin typeface="Be Vietnam Pro" pitchFamily="34" charset="0"/>
+                <a:ea typeface="Be Vietnam Pro" pitchFamily="34" charset="-122"/>
+                <a:cs typeface="Be Vietnam Pro" pitchFamily="34" charset="-120"/>
+              </a:rPr>
+              <a:t> tài nguyên</a:t>
+            </a:r>
+            <a:r>
+              <a:rPr lang="en-US" sz="2550" dirty="0" spc="0" kern="0">
                 <a:solidFill>
                   <a:srgbClr val="14161C"/>
                 </a:solidFill>
@@ -12906,7 +12851,7 @@
               <a:t> cho</a:t>
             </a:r>
             <a:r>
-              <a:rPr lang="en-US" sz="2475" dirty="0" spc="-2" kern="0">
+              <a:rPr lang="en-US" sz="2550" dirty="0" spc="-3" kern="0">
                 <a:solidFill>
                   <a:srgbClr val="14161C"/>
                 </a:solidFill>
@@ -12917,7 +12862,7 @@
               <a:t> node,</a:t>
             </a:r>
             <a:r>
-              <a:rPr lang="en-US" sz="2475" dirty="0" spc="-1" kern="0">
+              <a:rPr lang="en-US" sz="2550" dirty="0" spc="-2" kern="0">
                 <a:solidFill>
                   <a:srgbClr val="14161C"/>
                 </a:solidFill>
@@ -12928,7 +12873,7 @@
               <a:t> hoặc</a:t>
             </a:r>
             <a:r>
-              <a:rPr lang="en-US" sz="2475" dirty="0" spc="-2" kern="0">
+              <a:rPr lang="en-US" sz="2550" dirty="0" spc="2" kern="0">
                 <a:solidFill>
                   <a:srgbClr val="14161C"/>
                 </a:solidFill>
@@ -12939,7 +12884,7 @@
               <a:t> thêm</a:t>
             </a:r>
             <a:r>
-              <a:rPr lang="en-US" sz="2475" dirty="0" spc="-3" kern="0">
+              <a:rPr lang="en-US" sz="2550" dirty="0" spc="-2" kern="0">
                 <a:solidFill>
                   <a:srgbClr val="14161C"/>
                 </a:solidFill>
@@ -12949,12 +12894,12 @@
               </a:rPr>
               <a:t> node.</a:t>
             </a:r>
-            <a:endParaRPr lang="en-US" sz="2475" dirty="0"/>
+            <a:endParaRPr lang="en-US" sz="2550" dirty="0"/>
           </a:p>
           <a:p>
-            <a:pPr algn="l" marL="314325" indent="-224566">
+            <a:pPr algn="l" marL="323850" indent="-231371">
               <a:lnSpc>
-                <a:spcPts val="3465"/>
+                <a:spcPts val="3570"/>
               </a:lnSpc>
               <a:spcAft>
                 <a:spcPts val="1200"/>
@@ -12964,29 +12909,18 @@
               <a:buChar char="•"/>
             </a:pPr>
             <a:r>
-              <a:rPr lang="en-US" sz="2475" dirty="0" spc="4" kern="0">
-                <a:solidFill>
-                  <a:srgbClr val="14161C"/>
-                </a:solidFill>
-                <a:latin typeface="Be Vietnam Pro" pitchFamily="34" charset="0"/>
-                <a:ea typeface="Be Vietnam Pro" pitchFamily="34" charset="-122"/>
-                <a:cs typeface="Be Vietnam Pro" pitchFamily="34" charset="-120"/>
-              </a:rPr>
-              <a:t>Khai</a:t>
-            </a:r>
-            <a:r>
-              <a:rPr lang="en-US" sz="2475" dirty="0" spc="-2" kern="0">
-                <a:solidFill>
-                  <a:srgbClr val="14161C"/>
-                </a:solidFill>
-                <a:latin typeface="Be Vietnam Pro" pitchFamily="34" charset="0"/>
-                <a:ea typeface="Be Vietnam Pro" pitchFamily="34" charset="-122"/>
-                <a:cs typeface="Be Vietnam Pro" pitchFamily="34" charset="-120"/>
-              </a:rPr>
-              <a:t> đủ</a:t>
-            </a:r>
-            <a:r>
-              <a:rPr lang="en-US" sz="2475" dirty="0" spc="-17" kern="0">
+              <a:rPr lang="en-US" sz="2550" dirty="0" spc="-2" kern="0">
+                <a:solidFill>
+                  <a:srgbClr val="14161C"/>
+                </a:solidFill>
+                <a:latin typeface="Be Vietnam Pro" pitchFamily="34" charset="0"/>
+                <a:ea typeface="Be Vietnam Pro" pitchFamily="34" charset="-122"/>
+                <a:cs typeface="Be Vietnam Pro" pitchFamily="34" charset="-120"/>
+              </a:rPr>
+              <a:t>Khai đủ</a:t>
+            </a:r>
+            <a:r>
+              <a:rPr lang="en-US" sz="2550" dirty="0" spc="-13" kern="0">
                 <a:solidFill>
                   <a:srgbClr val="14161C"/>
                 </a:solidFill>
@@ -12997,18 +12931,29 @@
               <a:t> requests:</a:t>
             </a:r>
             <a:r>
-              <a:rPr lang="en-US" sz="2475" dirty="0" spc="-19" kern="0">
-                <a:solidFill>
-                  <a:srgbClr val="14161C"/>
-                </a:solidFill>
-                <a:latin typeface="Be Vietnam Pro" pitchFamily="34" charset="0"/>
-                <a:ea typeface="Be Vietnam Pro" pitchFamily="34" charset="-122"/>
-                <a:cs typeface="Be Vietnam Pro" pitchFamily="34" charset="-120"/>
-              </a:rPr>
-              <a:t> requests quyết</a:t>
-            </a:r>
-            <a:r>
-              <a:rPr lang="en-US" sz="2475" dirty="0" spc="20" kern="0">
+              <a:rPr lang="en-US" sz="2550" dirty="0" spc="-15" kern="0">
+                <a:solidFill>
+                  <a:srgbClr val="14161C"/>
+                </a:solidFill>
+                <a:latin typeface="Be Vietnam Pro" pitchFamily="34" charset="0"/>
+                <a:ea typeface="Be Vietnam Pro" pitchFamily="34" charset="-122"/>
+                <a:cs typeface="Be Vietnam Pro" pitchFamily="34" charset="-120"/>
+              </a:rPr>
+              <a:t> requests</a:t>
+            </a:r>
+            <a:r>
+              <a:rPr lang="en-US" sz="2550" dirty="0" spc="-18" kern="0">
+                <a:solidFill>
+                  <a:srgbClr val="14161C"/>
+                </a:solidFill>
+                <a:latin typeface="Be Vietnam Pro" pitchFamily="34" charset="0"/>
+                <a:ea typeface="Be Vietnam Pro" pitchFamily="34" charset="-122"/>
+                <a:cs typeface="Be Vietnam Pro" pitchFamily="34" charset="-120"/>
+              </a:rPr>
+              <a:t> quyết</a:t>
+            </a:r>
+            <a:r>
+              <a:rPr lang="en-US" sz="2550" dirty="0" spc="21" kern="0">
                 <a:solidFill>
                   <a:srgbClr val="14161C"/>
                 </a:solidFill>
@@ -13019,7 +12964,7 @@
               <a:t> định</a:t>
             </a:r>
             <a:r>
-              <a:rPr lang="en-US" sz="2475" dirty="0" spc="-2" kern="0">
+              <a:rPr lang="en-US" sz="2550" dirty="0" spc="1" kern="0">
                 <a:solidFill>
                   <a:srgbClr val="14161C"/>
                 </a:solidFill>
@@ -13030,7 +12975,7 @@
               <a:t> đặt</a:t>
             </a:r>
             <a:r>
-              <a:rPr lang="en-US" sz="2475" dirty="0" spc="-15" kern="0">
+              <a:rPr lang="en-US" sz="2550" dirty="0" spc="-11" kern="0">
                 <a:solidFill>
                   <a:srgbClr val="14161C"/>
                 </a:solidFill>
@@ -13040,12 +12985,12 @@
               </a:rPr>
               <a:t> Pod.</a:t>
             </a:r>
-            <a:endParaRPr lang="en-US" sz="2475" dirty="0"/>
+            <a:endParaRPr lang="en-US" sz="2550" dirty="0"/>
           </a:p>
           <a:p>
-            <a:pPr algn="l" marL="314325" indent="-224566">
+            <a:pPr algn="l" marL="323850" indent="-231371">
               <a:lnSpc>
-                <a:spcPts val="3465"/>
+                <a:spcPts val="3570"/>
               </a:lnSpc>
               <a:spcAft>
                 <a:spcPts val="1200"/>
@@ -13055,7 +13000,7 @@
               <a:buChar char="•"/>
             </a:pPr>
             <a:r>
-              <a:rPr lang="en-US" sz="2475" dirty="0" spc="2" kern="0">
+              <a:rPr lang="en-US" sz="2550" dirty="0" spc="1" kern="0">
                 <a:solidFill>
                   <a:srgbClr val="14161C"/>
                 </a:solidFill>
@@ -13066,18 +13011,29 @@
               <a:t>Chỉ</a:t>
             </a:r>
             <a:r>
-              <a:rPr lang="en-US" sz="2475" dirty="0" spc="0" kern="0">
-                <a:solidFill>
-                  <a:srgbClr val="14161C"/>
-                </a:solidFill>
-                <a:latin typeface="Be Vietnam Pro" pitchFamily="34" charset="0"/>
-                <a:ea typeface="Be Vietnam Pro" pitchFamily="34" charset="-122"/>
-                <a:cs typeface="Be Vietnam Pro" pitchFamily="34" charset="-120"/>
-              </a:rPr>
-              <a:t> có limits,</a:t>
-            </a:r>
-            <a:r>
-              <a:rPr lang="en-US" sz="2475" dirty="0" spc="1" kern="0">
+              <a:rPr lang="en-US" sz="2550" dirty="0" spc="0" kern="0">
+                <a:solidFill>
+                  <a:srgbClr val="14161C"/>
+                </a:solidFill>
+                <a:latin typeface="Be Vietnam Pro" pitchFamily="34" charset="0"/>
+                <a:ea typeface="Be Vietnam Pro" pitchFamily="34" charset="-122"/>
+                <a:cs typeface="Be Vietnam Pro" pitchFamily="34" charset="-120"/>
+              </a:rPr>
+              <a:t> có</a:t>
+            </a:r>
+            <a:r>
+              <a:rPr lang="en-US" sz="2550" dirty="0" spc="-1" kern="0">
+                <a:solidFill>
+                  <a:srgbClr val="14161C"/>
+                </a:solidFill>
+                <a:latin typeface="Be Vietnam Pro" pitchFamily="34" charset="0"/>
+                <a:ea typeface="Be Vietnam Pro" pitchFamily="34" charset="-122"/>
+                <a:cs typeface="Be Vietnam Pro" pitchFamily="34" charset="-120"/>
+              </a:rPr>
+              <a:t> limits,</a:t>
+            </a:r>
+            <a:r>
+              <a:rPr lang="en-US" sz="2550" dirty="0" spc="1" kern="0">
                 <a:solidFill>
                   <a:srgbClr val="14161C"/>
                 </a:solidFill>
@@ -13088,7 +13044,7 @@
               <a:t> không</a:t>
             </a:r>
             <a:r>
-              <a:rPr lang="en-US" sz="2475" dirty="0" spc="-1" kern="0">
+              <a:rPr lang="en-US" sz="2550" dirty="0" spc="-1" kern="0">
                 <a:solidFill>
                   <a:srgbClr val="14161C"/>
                 </a:solidFill>
@@ -13099,29 +13055,18 @@
               <a:t> admission:</a:t>
             </a:r>
             <a:r>
-              <a:rPr lang="en-US" sz="2475" dirty="0" spc="0" kern="0">
-                <a:solidFill>
-                  <a:srgbClr val="14161C"/>
-                </a:solidFill>
-                <a:latin typeface="Be Vietnam Pro" pitchFamily="34" charset="0"/>
-                <a:ea typeface="Be Vietnam Pro" pitchFamily="34" charset="-122"/>
-                <a:cs typeface="Be Vietnam Pro" pitchFamily="34" charset="-120"/>
-              </a:rPr>
-              <a:t> limits</a:t>
-            </a:r>
-            <a:r>
-              <a:rPr lang="en-US" sz="2475" dirty="0" spc="2" kern="0">
-                <a:solidFill>
-                  <a:srgbClr val="14161C"/>
-                </a:solidFill>
-                <a:latin typeface="Be Vietnam Pro" pitchFamily="34" charset="0"/>
-                <a:ea typeface="Be Vietnam Pro" pitchFamily="34" charset="-122"/>
-                <a:cs typeface="Be Vietnam Pro" pitchFamily="34" charset="-120"/>
-              </a:rPr>
-              <a:t> thành</a:t>
-            </a:r>
-            <a:r>
-              <a:rPr lang="en-US" sz="2475" dirty="0" spc="-17" kern="0">
+              <a:rPr lang="en-US" sz="2550" dirty="0" spc="0" kern="0">
+                <a:solidFill>
+                  <a:srgbClr val="14161C"/>
+                </a:solidFill>
+                <a:latin typeface="Be Vietnam Pro" pitchFamily="34" charset="0"/>
+                <a:ea typeface="Be Vietnam Pro" pitchFamily="34" charset="-122"/>
+                <a:cs typeface="Be Vietnam Pro" pitchFamily="34" charset="-120"/>
+              </a:rPr>
+              <a:t> limits thành</a:t>
+            </a:r>
+            <a:r>
+              <a:rPr lang="en-US" sz="2550" dirty="0" spc="-13" kern="0">
                 <a:solidFill>
                   <a:srgbClr val="14161C"/>
                 </a:solidFill>
@@ -13131,19 +13076,19 @@
               </a:rPr>
               <a:t> requests.</a:t>
             </a:r>
-            <a:endParaRPr lang="en-US" sz="2475" dirty="0"/>
+            <a:endParaRPr lang="en-US" sz="2550" dirty="0"/>
           </a:p>
           <a:p>
-            <a:pPr algn="l" marL="314325" indent="-224566">
+            <a:pPr algn="l" marL="323850" indent="-231371">
               <a:lnSpc>
-                <a:spcPts val="3465"/>
+                <a:spcPts val="3570"/>
               </a:lnSpc>
               <a:buSzPct val="100000"/>
               <a:buFont typeface="Arial"/>
               <a:buChar char="•"/>
             </a:pPr>
             <a:r>
-              <a:rPr lang="en-US" sz="2475" dirty="0" spc="-37" kern="0">
+              <a:rPr lang="en-US" sz="2550" dirty="0" spc="-33" kern="0">
                 <a:solidFill>
                   <a:srgbClr val="14161C"/>
                 </a:solidFill>
@@ -13154,7 +13099,7 @@
               <a:t>Xem</a:t>
             </a:r>
             <a:r>
-              <a:rPr lang="en-US" sz="2475" dirty="0" spc="-19" kern="0">
+              <a:rPr lang="en-US" sz="2550" dirty="0" spc="-15" kern="0">
                 <a:solidFill>
                   <a:srgbClr val="14161C"/>
                 </a:solidFill>
@@ -13165,7 +13110,7 @@
               <a:t> requests</a:t>
             </a:r>
             <a:r>
-              <a:rPr lang="en-US" sz="2475" dirty="0" spc="-9" kern="0">
+              <a:rPr lang="en-US" sz="2550" dirty="0" spc="-7" kern="0">
                 <a:solidFill>
                   <a:srgbClr val="14161C"/>
                 </a:solidFill>
@@ -13176,7 +13121,7 @@
               <a:t> thật:</a:t>
             </a:r>
             <a:r>
-              <a:rPr lang="en-US" sz="2475" dirty="0" spc="-4" kern="0">
+              <a:rPr lang="en-US" sz="2550" dirty="0" spc="-1" kern="0">
                 <a:solidFill>
                   <a:srgbClr val="14161C"/>
                 </a:solidFill>
@@ -13187,7 +13132,7 @@
               <a:t> kubectl</a:t>
             </a:r>
             <a:r>
-              <a:rPr lang="en-US" sz="2475" dirty="0" spc="-20" kern="0">
+              <a:rPr lang="en-US" sz="2550" dirty="0" spc="-17" kern="0">
                 <a:solidFill>
                   <a:srgbClr val="14161C"/>
                 </a:solidFill>
@@ -13198,7 +13143,7 @@
               <a:t> get</a:t>
             </a:r>
             <a:r>
-              <a:rPr lang="en-US" sz="2475" dirty="0" spc="-7" kern="0">
+              <a:rPr lang="en-US" sz="2550" dirty="0" spc="-7" kern="0">
                 <a:solidFill>
                   <a:srgbClr val="14161C"/>
                 </a:solidFill>
@@ -13209,7 +13154,7 @@
               <a:t> pod</a:t>
             </a:r>
             <a:r>
-              <a:rPr lang="en-US" sz="2475" dirty="0" spc="0" kern="0">
+              <a:rPr lang="en-US" sz="2550" dirty="0" spc="0" kern="0">
                 <a:solidFill>
                   <a:srgbClr val="14161C"/>
                 </a:solidFill>
@@ -13220,7 +13165,7 @@
               <a:t> -o</a:t>
             </a:r>
             <a:r>
-              <a:rPr lang="en-US" sz="2475" dirty="0" spc="-14" kern="0">
+              <a:rPr lang="en-US" sz="2550" dirty="0" spc="-14" kern="0">
                 <a:solidFill>
                   <a:srgbClr val="14161C"/>
                 </a:solidFill>
@@ -13230,7 +13175,7 @@
               </a:rPr>
               <a:t> yaml.</a:t>
             </a:r>
-            <a:endParaRPr lang="en-US" sz="2475" dirty="0"/>
+            <a:endParaRPr lang="en-US" sz="2550" dirty="0"/>
           </a:p>
         </p:txBody>
       </p:sp>
@@ -13877,7 +13822,7 @@
         <p:spPr>
           <a:xfrm>
             <a:off x="1333500" y="2971800"/>
-            <a:ext cx="6858000" cy="476250"/>
+            <a:ext cx="7620000" cy="476250"/>
           </a:xfrm>
           <a:prstGeom prst="rect">
             <a:avLst/>
@@ -13893,7 +13838,7 @@
               <a:buNone/>
             </a:pPr>
             <a:r>
-              <a:rPr lang="en-US" sz="2250" dirty="0" kern="0">
+              <a:rPr lang="en-US" sz="2550" dirty="0" spc="5" kern="0">
                 <a:solidFill>
                   <a:srgbClr val="14161C"/>
                 </a:solidFill>
@@ -13903,7 +13848,7 @@
               </a:rPr>
               <a:t>kubectl describe pod</a:t>
             </a:r>
-            <a:endParaRPr lang="en-US" sz="2250" dirty="0"/>
+            <a:endParaRPr lang="en-US" sz="2550" dirty="0"/>
           </a:p>
         </p:txBody>
       </p:sp>
@@ -13915,8 +13860,8 @@
         </p:nvSpPr>
         <p:spPr>
           <a:xfrm>
-            <a:off x="8382000" y="2971800"/>
-            <a:ext cx="8763000" cy="476250"/>
+            <a:off x="9144000" y="2971800"/>
+            <a:ext cx="8001000" cy="476250"/>
           </a:xfrm>
           <a:prstGeom prst="rect">
             <a:avLst/>
@@ -13932,7 +13877,7 @@
               <a:buNone/>
             </a:pPr>
             <a:r>
-              <a:rPr lang="en-US" sz="2250" dirty="0" spc="-1" kern="0">
+              <a:rPr lang="en-US" sz="2550" dirty="0" spc="1" kern="0">
                 <a:solidFill>
                   <a:srgbClr val="14161C"/>
                 </a:solidFill>
@@ -13943,7 +13888,7 @@
               <a:t>Phần</a:t>
             </a:r>
             <a:r>
-              <a:rPr lang="en-US" sz="2250" dirty="0" spc="-13" kern="0">
+              <a:rPr lang="en-US" sz="2550" dirty="0" spc="-15" kern="0">
                 <a:solidFill>
                   <a:srgbClr val="14161C"/>
                 </a:solidFill>
@@ -13954,7 +13899,7 @@
               <a:t> Events</a:t>
             </a:r>
             <a:r>
-              <a:rPr lang="en-US" sz="2250" dirty="0" spc="1" kern="0">
+              <a:rPr lang="en-US" sz="2550" dirty="0" spc="0" kern="0">
                 <a:solidFill>
                   <a:srgbClr val="14161C"/>
                 </a:solidFill>
@@ -13965,7 +13910,7 @@
               <a:t> cho</a:t>
             </a:r>
             <a:r>
-              <a:rPr lang="en-US" sz="2250" dirty="0" spc="-5" kern="0">
+              <a:rPr lang="en-US" sz="2550" dirty="0" spc="-4" kern="0">
                 <a:solidFill>
                   <a:srgbClr val="14161C"/>
                 </a:solidFill>
@@ -13976,7 +13921,7 @@
               <a:t> biết</a:t>
             </a:r>
             <a:r>
-              <a:rPr lang="en-US" sz="2250" dirty="0" spc="1" kern="0">
+              <a:rPr lang="en-US" sz="2550" dirty="0" spc="0" kern="0">
                 <a:solidFill>
                   <a:srgbClr val="14161C"/>
                 </a:solidFill>
@@ -13987,7 +13932,7 @@
               <a:t> lý</a:t>
             </a:r>
             <a:r>
-              <a:rPr lang="en-US" sz="2250" dirty="0" spc="2" kern="0">
+              <a:rPr lang="en-US" sz="2550" dirty="0" spc="-1" kern="0">
                 <a:solidFill>
                   <a:srgbClr val="14161C"/>
                 </a:solidFill>
@@ -13998,29 +13943,18 @@
               <a:t> do</a:t>
             </a:r>
             <a:r>
-              <a:rPr lang="en-US" sz="2250" dirty="0" spc="4" kern="0">
-                <a:solidFill>
-                  <a:srgbClr val="14161C"/>
-                </a:solidFill>
-                <a:latin typeface="Be Vietnam Pro" pitchFamily="34" charset="0"/>
-                <a:ea typeface="Be Vietnam Pro" pitchFamily="34" charset="-122"/>
-                <a:cs typeface="Be Vietnam Pro" pitchFamily="34" charset="-120"/>
-              </a:rPr>
-              <a:t> ở</a:t>
-            </a:r>
-            <a:r>
-              <a:rPr lang="en-US" sz="2250" dirty="0" spc="0" kern="0">
-                <a:solidFill>
-                  <a:srgbClr val="14161C"/>
-                </a:solidFill>
-                <a:latin typeface="Be Vietnam Pro" pitchFamily="34" charset="0"/>
-                <a:ea typeface="Be Vietnam Pro" pitchFamily="34" charset="-122"/>
-                <a:cs typeface="Be Vietnam Pro" pitchFamily="34" charset="-120"/>
-              </a:rPr>
-              <a:t> chặng</a:t>
-            </a:r>
-            <a:r>
-              <a:rPr lang="en-US" sz="2250" dirty="0" spc="1" kern="0">
+              <a:rPr lang="en-US" sz="2550" dirty="0" spc="0" kern="0">
+                <a:solidFill>
+                  <a:srgbClr val="14161C"/>
+                </a:solidFill>
+                <a:latin typeface="Be Vietnam Pro" pitchFamily="34" charset="0"/>
+                <a:ea typeface="Be Vietnam Pro" pitchFamily="34" charset="-122"/>
+                <a:cs typeface="Be Vietnam Pro" pitchFamily="34" charset="-120"/>
+              </a:rPr>
+              <a:t> ở chặng</a:t>
+            </a:r>
+            <a:r>
+              <a:rPr lang="en-US" sz="2550" dirty="0" spc="1" kern="0">
                 <a:solidFill>
                   <a:srgbClr val="14161C"/>
                 </a:solidFill>
@@ -14030,7 +13964,7 @@
               </a:rPr>
               <a:t> nào.</a:t>
             </a:r>
-            <a:endParaRPr lang="en-US" sz="2250" dirty="0"/>
+            <a:endParaRPr lang="en-US" sz="2550" dirty="0"/>
           </a:p>
         </p:txBody>
       </p:sp>
@@ -14092,7 +14026,7 @@
         <p:spPr>
           <a:xfrm>
             <a:off x="1333500" y="4229100"/>
-            <a:ext cx="6858000" cy="476250"/>
+            <a:ext cx="7620000" cy="476250"/>
           </a:xfrm>
           <a:prstGeom prst="rect">
             <a:avLst/>
@@ -14108,7 +14042,7 @@
               <a:buNone/>
             </a:pPr>
             <a:r>
-              <a:rPr lang="en-US" sz="2250" dirty="0" kern="0">
+              <a:rPr lang="en-US" sz="2550" dirty="0" spc="5" kern="0">
                 <a:solidFill>
                   <a:srgbClr val="E8472B"/>
                 </a:solidFill>
@@ -14116,9 +14050,9 @@
                 <a:ea typeface="JetBrains Mono ExtraBold" pitchFamily="34" charset="-122"/>
                 <a:cs typeface="JetBrains Mono ExtraBold" pitchFamily="34" charset="-120"/>
               </a:rPr>
-              <a:t>kubectl logs --previous</a:t>
-            </a:r>
-            <a:endParaRPr lang="en-US" sz="2250" dirty="0"/>
+              <a:t>kubectl logs ten-pod --previous</a:t>
+            </a:r>
+            <a:endParaRPr lang="en-US" sz="2550" dirty="0"/>
           </a:p>
         </p:txBody>
       </p:sp>
@@ -14130,8 +14064,8 @@
         </p:nvSpPr>
         <p:spPr>
           <a:xfrm>
-            <a:off x="8382000" y="4229100"/>
-            <a:ext cx="8763000" cy="476250"/>
+            <a:off x="9144000" y="4229100"/>
+            <a:ext cx="8001000" cy="476250"/>
           </a:xfrm>
           <a:prstGeom prst="rect">
             <a:avLst/>
@@ -14147,7 +14081,7 @@
               <a:buNone/>
             </a:pPr>
             <a:r>
-              <a:rPr lang="en-US" sz="2250" dirty="0" spc="-14" kern="0">
+              <a:rPr lang="en-US" sz="2550" dirty="0" spc="-10" kern="0">
                 <a:solidFill>
                   <a:srgbClr val="14161C"/>
                 </a:solidFill>
@@ -14158,18 +14092,29 @@
               <a:t>Nhật</a:t>
             </a:r>
             <a:r>
-              <a:rPr lang="en-US" sz="2250" dirty="0" spc="2" kern="0">
-                <a:solidFill>
-                  <a:srgbClr val="14161C"/>
-                </a:solidFill>
-                <a:latin typeface="Be Vietnam Pro" pitchFamily="34" charset="0"/>
-                <a:ea typeface="Be Vietnam Pro" pitchFamily="34" charset="-122"/>
-                <a:cs typeface="Be Vietnam Pro" pitchFamily="34" charset="-120"/>
-              </a:rPr>
-              <a:t> ký của</a:t>
-            </a:r>
-            <a:r>
-              <a:rPr lang="en-US" sz="2250" dirty="0" spc="0" kern="0">
+              <a:rPr lang="en-US" sz="2550" dirty="0" spc="0" kern="0">
+                <a:solidFill>
+                  <a:srgbClr val="14161C"/>
+                </a:solidFill>
+                <a:latin typeface="Be Vietnam Pro" pitchFamily="34" charset="0"/>
+                <a:ea typeface="Be Vietnam Pro" pitchFamily="34" charset="-122"/>
+                <a:cs typeface="Be Vietnam Pro" pitchFamily="34" charset="-120"/>
+              </a:rPr>
+              <a:t> ký</a:t>
+            </a:r>
+            <a:r>
+              <a:rPr lang="en-US" sz="2550" dirty="0" spc="-2" kern="0">
+                <a:solidFill>
+                  <a:srgbClr val="14161C"/>
+                </a:solidFill>
+                <a:latin typeface="Be Vietnam Pro" pitchFamily="34" charset="0"/>
+                <a:ea typeface="Be Vietnam Pro" pitchFamily="34" charset="-122"/>
+                <a:cs typeface="Be Vietnam Pro" pitchFamily="34" charset="-120"/>
+              </a:rPr>
+              <a:t> của</a:t>
+            </a:r>
+            <a:r>
+              <a:rPr lang="en-US" sz="2550" dirty="0" spc="1" kern="0">
                 <a:solidFill>
                   <a:srgbClr val="14161C"/>
                 </a:solidFill>
@@ -14180,7 +14125,7 @@
               <a:t> lần</a:t>
             </a:r>
             <a:r>
-              <a:rPr lang="en-US" sz="2250" dirty="0" spc="-7" kern="0">
+              <a:rPr lang="en-US" sz="2550" dirty="0" spc="-8" kern="0">
                 <a:solidFill>
                   <a:srgbClr val="14161C"/>
                 </a:solidFill>
@@ -14191,7 +14136,7 @@
               <a:t> chạy</a:t>
             </a:r>
             <a:r>
-              <a:rPr lang="en-US" sz="2250" dirty="0" spc="7" kern="0">
+              <a:rPr lang="en-US" sz="2550" dirty="0" spc="6" kern="0">
                 <a:solidFill>
                   <a:srgbClr val="14161C"/>
                 </a:solidFill>
@@ -14202,7 +14147,7 @@
               <a:t> trước</a:t>
             </a:r>
             <a:r>
-              <a:rPr lang="en-US" sz="2250" dirty="0" spc="-1" kern="0">
+              <a:rPr lang="en-US" sz="2550" dirty="0" spc="0" kern="0">
                 <a:solidFill>
                   <a:srgbClr val="14161C"/>
                 </a:solidFill>
@@ -14213,7 +14158,7 @@
               <a:t> khi</a:t>
             </a:r>
             <a:r>
-              <a:rPr lang="en-US" sz="2250" dirty="0" spc="-2" kern="0">
+              <a:rPr lang="en-US" sz="2550" dirty="0" spc="-3" kern="0">
                 <a:solidFill>
                   <a:srgbClr val="14161C"/>
                 </a:solidFill>
@@ -14223,7 +14168,7 @@
               </a:rPr>
               <a:t> chết.</a:t>
             </a:r>
-            <a:endParaRPr lang="en-US" sz="2250" dirty="0"/>
+            <a:endParaRPr lang="en-US" sz="2550" dirty="0"/>
           </a:p>
         </p:txBody>
       </p:sp>
@@ -14284,8 +14229,8 @@
         </p:nvSpPr>
         <p:spPr>
           <a:xfrm>
-            <a:off x="1333500" y="5486400"/>
-            <a:ext cx="6858000" cy="476250"/>
+            <a:off x="1333500" y="5314950"/>
+            <a:ext cx="7620000" cy="800100"/>
           </a:xfrm>
           <a:prstGeom prst="rect">
             <a:avLst/>
@@ -14301,7 +14246,7 @@
               <a:buNone/>
             </a:pPr>
             <a:r>
-              <a:rPr lang="en-US" sz="2250" dirty="0" kern="0">
+              <a:rPr lang="en-US" sz="2550" dirty="0" spc="5" kern="0">
                 <a:solidFill>
                   <a:srgbClr val="14161C"/>
                 </a:solidFill>
@@ -14309,9 +14254,26 @@
                 <a:ea typeface="JetBrains Mono ExtraBold" pitchFamily="34" charset="-122"/>
                 <a:cs typeface="JetBrains Mono ExtraBold" pitchFamily="34" charset="-120"/>
               </a:rPr>
-              <a:t>kubectl get events --sort-by=...</a:t>
-            </a:r>
-            <a:endParaRPr lang="en-US" sz="2250" dirty="0"/>
+              <a:t>kubectl get events</a:t>
+            </a:r>
+            <a:endParaRPr lang="en-US" sz="2550" dirty="0"/>
+          </a:p>
+          <a:p>
+            <a:pPr algn="l" indent="0" marL="0">
+              <a:buNone/>
+            </a:pPr>
+            <a:r>
+              <a:rPr lang="en-US" sz="2550" dirty="0" spc="5" kern="0">
+                <a:solidFill>
+                  <a:srgbClr val="14161C"/>
+                </a:solidFill>
+                <a:latin typeface="JetBrains Mono ExtraBold" pitchFamily="34" charset="0"/>
+                <a:ea typeface="JetBrains Mono ExtraBold" pitchFamily="34" charset="-122"/>
+                <a:cs typeface="JetBrains Mono ExtraBold" pitchFamily="34" charset="-120"/>
+              </a:rPr>
+              <a:t>--sort-by=.metadata.creationTimestamp</a:t>
+            </a:r>
+            <a:endParaRPr lang="en-US" sz="2550" dirty="0"/>
           </a:p>
         </p:txBody>
       </p:sp>
@@ -14323,8 +14285,8 @@
         </p:nvSpPr>
         <p:spPr>
           <a:xfrm>
-            <a:off x="8382000" y="5486400"/>
-            <a:ext cx="8763000" cy="476250"/>
+            <a:off x="9144000" y="5486400"/>
+            <a:ext cx="8001000" cy="476250"/>
           </a:xfrm>
           <a:prstGeom prst="rect">
             <a:avLst/>
@@ -14340,7 +14302,7 @@
               <a:buNone/>
             </a:pPr>
             <a:r>
-              <a:rPr lang="en-US" sz="2250" dirty="0" spc="1" kern="0">
+              <a:rPr lang="en-US" sz="2550" dirty="0" spc="-1" kern="0">
                 <a:solidFill>
                   <a:srgbClr val="14161C"/>
                 </a:solidFill>
@@ -14351,7 +14313,7 @@
               <a:t>Sắp</a:t>
             </a:r>
             <a:r>
-              <a:rPr lang="en-US" sz="2250" dirty="0" spc="5" kern="0">
+              <a:rPr lang="en-US" sz="2550" dirty="0" spc="-4" kern="0">
                 <a:solidFill>
                   <a:srgbClr val="14161C"/>
                 </a:solidFill>
@@ -14362,7 +14324,7 @@
               <a:t> sự</a:t>
             </a:r>
             <a:r>
-              <a:rPr lang="en-US" sz="2250" dirty="0" spc="-1" kern="0">
+              <a:rPr lang="en-US" sz="2550" dirty="0" spc="0" kern="0">
                 <a:solidFill>
                   <a:srgbClr val="14161C"/>
                 </a:solidFill>
@@ -14373,7 +14335,7 @@
               <a:t> kiện</a:t>
             </a:r>
             <a:r>
-              <a:rPr lang="en-US" sz="2250" dirty="0" spc="-3" kern="0">
+              <a:rPr lang="en-US" sz="2550" dirty="0" spc="-1" kern="0">
                 <a:solidFill>
                   <a:srgbClr val="14161C"/>
                 </a:solidFill>
@@ -14384,7 +14346,7 @@
               <a:t> theo</a:t>
             </a:r>
             <a:r>
-              <a:rPr lang="en-US" sz="2250" dirty="0" spc="1" kern="0">
+              <a:rPr lang="en-US" sz="2550" dirty="0" spc="0" kern="0">
                 <a:solidFill>
                   <a:srgbClr val="14161C"/>
                 </a:solidFill>
@@ -14395,7 +14357,7 @@
               <a:t> thời</a:t>
             </a:r>
             <a:r>
-              <a:rPr lang="en-US" sz="2250" dirty="0" spc="16" kern="0">
+              <a:rPr lang="en-US" sz="2550" dirty="0" spc="21" kern="0">
                 <a:solidFill>
                   <a:srgbClr val="14161C"/>
                 </a:solidFill>
@@ -14406,7 +14368,7 @@
               <a:t> điểm</a:t>
             </a:r>
             <a:r>
-              <a:rPr lang="en-US" sz="2250" dirty="0" spc="-9" kern="0">
+              <a:rPr lang="en-US" sz="2550" dirty="0" spc="-8" kern="0">
                 <a:solidFill>
                   <a:srgbClr val="14161C"/>
                 </a:solidFill>
@@ -14416,7 +14378,7 @@
               </a:rPr>
               <a:t> tạo.</a:t>
             </a:r>
-            <a:endParaRPr lang="en-US" sz="2250" dirty="0"/>
+            <a:endParaRPr lang="en-US" sz="2550" dirty="0"/>
           </a:p>
         </p:txBody>
       </p:sp>
@@ -14478,7 +14440,7 @@
         <p:spPr>
           <a:xfrm>
             <a:off x="1333500" y="6743700"/>
-            <a:ext cx="6858000" cy="476250"/>
+            <a:ext cx="7620000" cy="476250"/>
           </a:xfrm>
           <a:prstGeom prst="rect">
             <a:avLst/>
@@ -14494,7 +14456,7 @@
               <a:buNone/>
             </a:pPr>
             <a:r>
-              <a:rPr lang="en-US" sz="2250" dirty="0" kern="0">
+              <a:rPr lang="en-US" sz="2550" dirty="0" spc="5" kern="0">
                 <a:solidFill>
                   <a:srgbClr val="E8472B"/>
                 </a:solidFill>
@@ -14504,7 +14466,7 @@
               </a:rPr>
               <a:t>kubectl describe node</a:t>
             </a:r>
-            <a:endParaRPr lang="en-US" sz="2250" dirty="0"/>
+            <a:endParaRPr lang="en-US" sz="2550" dirty="0"/>
           </a:p>
         </p:txBody>
       </p:sp>
@@ -14516,8 +14478,8 @@
         </p:nvSpPr>
         <p:spPr>
           <a:xfrm>
-            <a:off x="8382000" y="6743700"/>
-            <a:ext cx="8763000" cy="476250"/>
+            <a:off x="9144000" y="6743700"/>
+            <a:ext cx="8001000" cy="476250"/>
           </a:xfrm>
           <a:prstGeom prst="rect">
             <a:avLst/>
@@ -14533,7 +14495,7 @@
               <a:buNone/>
             </a:pPr>
             <a:r>
-              <a:rPr lang="en-US" sz="2250" dirty="0" spc="4" kern="0">
+              <a:rPr lang="en-US" sz="2550" dirty="0" spc="-6" kern="0">
                 <a:solidFill>
                   <a:srgbClr val="14161C"/>
                 </a:solidFill>
@@ -14544,7 +14506,7 @@
               <a:t>Sự</a:t>
             </a:r>
             <a:r>
-              <a:rPr lang="en-US" sz="2250" dirty="0" spc="-1" kern="0">
+              <a:rPr lang="en-US" sz="2550" dirty="0" spc="0" kern="0">
                 <a:solidFill>
                   <a:srgbClr val="14161C"/>
                 </a:solidFill>
@@ -14555,7 +14517,7 @@
               <a:t> kiện</a:t>
             </a:r>
             <a:r>
-              <a:rPr lang="en-US" sz="2250" dirty="0" spc="2" kern="0">
+              <a:rPr lang="en-US" sz="2550" dirty="0" spc="-1" kern="0">
                 <a:solidFill>
                   <a:srgbClr val="14161C"/>
                 </a:solidFill>
@@ -14566,7 +14528,7 @@
               <a:t> của</a:t>
             </a:r>
             <a:r>
-              <a:rPr lang="en-US" sz="2250" dirty="0" spc="-2" kern="0">
+              <a:rPr lang="en-US" sz="2550" dirty="0" spc="-3" kern="0">
                 <a:solidFill>
                   <a:srgbClr val="14161C"/>
                 </a:solidFill>
@@ -14577,18 +14539,29 @@
               <a:t> node,</a:t>
             </a:r>
             <a:r>
-              <a:rPr lang="en-US" sz="2250" dirty="0" spc="-1" kern="0">
-                <a:solidFill>
-                  <a:srgbClr val="14161C"/>
-                </a:solidFill>
-                <a:latin typeface="Be Vietnam Pro" pitchFamily="34" charset="0"/>
-                <a:ea typeface="Be Vietnam Pro" pitchFamily="34" charset="-122"/>
-                <a:cs typeface="Be Vietnam Pro" pitchFamily="34" charset="-120"/>
-              </a:rPr>
-              <a:t> khi nghi node</a:t>
-            </a:r>
-            <a:r>
-              <a:rPr lang="en-US" sz="2250" dirty="0" spc="-6" kern="0">
+              <a:rPr lang="en-US" sz="2550" dirty="0" spc="0" kern="0">
+                <a:solidFill>
+                  <a:srgbClr val="14161C"/>
+                </a:solidFill>
+                <a:latin typeface="Be Vietnam Pro" pitchFamily="34" charset="0"/>
+                <a:ea typeface="Be Vietnam Pro" pitchFamily="34" charset="-122"/>
+                <a:cs typeface="Be Vietnam Pro" pitchFamily="34" charset="-120"/>
+              </a:rPr>
+              <a:t> khi nghi</a:t>
+            </a:r>
+            <a:r>
+              <a:rPr lang="en-US" sz="2550" dirty="0" spc="-3" kern="0">
+                <a:solidFill>
+                  <a:srgbClr val="14161C"/>
+                </a:solidFill>
+                <a:latin typeface="Be Vietnam Pro" pitchFamily="34" charset="0"/>
+                <a:ea typeface="Be Vietnam Pro" pitchFamily="34" charset="-122"/>
+                <a:cs typeface="Be Vietnam Pro" pitchFamily="34" charset="-120"/>
+              </a:rPr>
+              <a:t> node</a:t>
+            </a:r>
+            <a:r>
+              <a:rPr lang="en-US" sz="2550" dirty="0" spc="-5" kern="0">
                 <a:solidFill>
                   <a:srgbClr val="14161C"/>
                 </a:solidFill>
@@ -14599,7 +14572,7 @@
               <a:t> hết</a:t>
             </a:r>
             <a:r>
-              <a:rPr lang="en-US" sz="2250" dirty="0" spc="1" kern="0">
+              <a:rPr lang="en-US" sz="2550" dirty="0" spc="-4" kern="0">
                 <a:solidFill>
                   <a:srgbClr val="14161C"/>
                 </a:solidFill>
@@ -14610,7 +14583,7 @@
               <a:t> bộ</a:t>
             </a:r>
             <a:r>
-              <a:rPr lang="en-US" sz="2250" dirty="0" spc="3" kern="0">
+              <a:rPr lang="en-US" sz="2550" dirty="0" spc="0" kern="0">
                 <a:solidFill>
                   <a:srgbClr val="14161C"/>
                 </a:solidFill>
@@ -14620,7 +14593,7 @@
               </a:rPr>
               <a:t> nhớ.</a:t>
             </a:r>
-            <a:endParaRPr lang="en-US" sz="2250" dirty="0"/>
+            <a:endParaRPr lang="en-US" sz="2550" dirty="0"/>
           </a:p>
         </p:txBody>
       </p:sp>
@@ -14682,7 +14655,7 @@
         <p:spPr>
           <a:xfrm>
             <a:off x="1333500" y="8001000"/>
-            <a:ext cx="6858000" cy="476250"/>
+            <a:ext cx="7620000" cy="476250"/>
           </a:xfrm>
           <a:prstGeom prst="rect">
             <a:avLst/>
@@ -14698,7 +14671,7 @@
               <a:buNone/>
             </a:pPr>
             <a:r>
-              <a:rPr lang="en-US" sz="2250" dirty="0" kern="0">
+              <a:rPr lang="en-US" sz="2550" dirty="0" spc="5" kern="0">
                 <a:solidFill>
                   <a:srgbClr val="B45309"/>
                 </a:solidFill>
@@ -14708,7 +14681,7 @@
               </a:rPr>
               <a:t>kubectl get pod -o yaml</a:t>
             </a:r>
-            <a:endParaRPr lang="en-US" sz="2250" dirty="0"/>
+            <a:endParaRPr lang="en-US" sz="2550" dirty="0"/>
           </a:p>
         </p:txBody>
       </p:sp>
@@ -14720,8 +14693,8 @@
         </p:nvSpPr>
         <p:spPr>
           <a:xfrm>
-            <a:off x="8382000" y="8001000"/>
-            <a:ext cx="8763000" cy="476250"/>
+            <a:off x="9144000" y="8001000"/>
+            <a:ext cx="8001000" cy="476250"/>
           </a:xfrm>
           <a:prstGeom prst="rect">
             <a:avLst/>
@@ -14737,7 +14710,7 @@
               <a:buNone/>
             </a:pPr>
             <a:r>
-              <a:rPr lang="en-US" sz="2250" dirty="0" spc="-15" kern="0">
+              <a:rPr lang="en-US" sz="2550" dirty="0" spc="-17" kern="0">
                 <a:solidFill>
                   <a:srgbClr val="14161C"/>
                 </a:solidFill>
@@ -14748,7 +14721,7 @@
               <a:t>requests</a:t>
             </a:r>
             <a:r>
-              <a:rPr lang="en-US" sz="2250" dirty="0" spc="10" kern="0">
+              <a:rPr lang="en-US" sz="2550" dirty="0" spc="7" kern="0">
                 <a:solidFill>
                   <a:srgbClr val="14161C"/>
                 </a:solidFill>
@@ -14759,7 +14732,7 @@
               <a:t> thực</a:t>
             </a:r>
             <a:r>
-              <a:rPr lang="en-US" sz="2250" dirty="0" spc="5" kern="0">
+              <a:rPr lang="en-US" sz="2550" dirty="0" spc="-3" kern="0">
                 <a:solidFill>
                   <a:srgbClr val="14161C"/>
                 </a:solidFill>
@@ -14770,7 +14743,7 @@
               <a:t> sự</a:t>
             </a:r>
             <a:r>
-              <a:rPr lang="en-US" sz="2250" dirty="0" spc="2" kern="0">
+              <a:rPr lang="en-US" sz="2550" dirty="0" spc="-2" kern="0">
                 <a:solidFill>
                   <a:srgbClr val="14161C"/>
                 </a:solidFill>
@@ -14781,7 +14754,7 @@
               <a:t> của</a:t>
             </a:r>
             <a:r>
-              <a:rPr lang="en-US" sz="2250" dirty="0" spc="-10" kern="0">
+              <a:rPr lang="en-US" sz="2550" dirty="0" spc="-11" kern="0">
                 <a:solidFill>
                   <a:srgbClr val="14161C"/>
                 </a:solidFill>
@@ -14791,7 +14764,7 @@
               </a:rPr>
               <a:t> Pod.</a:t>
             </a:r>
-            <a:endParaRPr lang="en-US" sz="2250" dirty="0"/>
+            <a:endParaRPr lang="en-US" sz="2550" dirty="0"/>
           </a:p>
         </p:txBody>
       </p:sp>

--- a/system-design-101/vi/lessons/sd-13-025/slides/sd-13-025.pptx
+++ b/system-design-101/vi/lessons/sd-13-025/slides/sd-13-025.pptx
@@ -4668,7 +4668,7 @@
               <a:t> chặng</a:t>
             </a:r>
             <a:r>
-              <a:rPr lang="en-US" sz="3000" dirty="0" spc="-4" kern="0">
+              <a:rPr lang="en-US" sz="3000" dirty="0" spc="-18" kern="0">
                 <a:solidFill>
                   <a:srgbClr val="6B6A66"/>
                 </a:solidFill>
@@ -4676,10 +4676,10 @@
                 <a:ea typeface="Be Vietnam Pro" pitchFamily="34" charset="-122"/>
                 <a:cs typeface="Be Vietnam Pro" pitchFamily="34" charset="-120"/>
               </a:rPr>
-              <a:t> theo</a:t>
-            </a:r>
-            <a:r>
-              <a:rPr lang="en-US" sz="3000" dirty="0" spc="-1" kern="0">
+              <a:t> Pod</a:t>
+            </a:r>
+            <a:r>
+              <a:rPr lang="en-US" sz="3000" dirty="0" spc="-2" kern="0">
                 <a:solidFill>
                   <a:srgbClr val="6B6A66"/>
                 </a:solidFill>
@@ -4687,10 +4687,10 @@
                 <a:ea typeface="Be Vietnam Pro" pitchFamily="34" charset="-122"/>
                 <a:cs typeface="Be Vietnam Pro" pitchFamily="34" charset="-120"/>
               </a:rPr>
-              <a:t> thứ</a:t>
-            </a:r>
-            <a:r>
-              <a:rPr lang="en-US" sz="3000" dirty="0" spc="-2" kern="0">
+              <a:t> lần</a:t>
+            </a:r>
+            <a:r>
+              <a:rPr lang="en-US" sz="3000" dirty="0" spc="11" kern="0">
                 <a:solidFill>
                   <a:srgbClr val="6B6A66"/>
                 </a:solidFill>
@@ -4698,21 +4698,10 @@
                 <a:ea typeface="Be Vietnam Pro" pitchFamily="34" charset="-122"/>
                 <a:cs typeface="Be Vietnam Pro" pitchFamily="34" charset="-120"/>
               </a:rPr>
-              <a:t> tự</a:t>
-            </a:r>
-            <a:r>
-              <a:rPr lang="en-US" sz="3000" dirty="0" spc="-17" kern="0">
-                <a:solidFill>
-                  <a:srgbClr val="6B6A66"/>
-                </a:solidFill>
-                <a:latin typeface="Be Vietnam Pro" pitchFamily="34" charset="0"/>
-                <a:ea typeface="Be Vietnam Pro" pitchFamily="34" charset="-122"/>
-                <a:cs typeface="Be Vietnam Pro" pitchFamily="34" charset="-120"/>
-              </a:rPr>
-              <a:t> Pod</a:t>
-            </a:r>
-            <a:r>
-              <a:rPr lang="en-US" sz="3000" dirty="0" spc="41" kern="0">
+              <a:t> lượt</a:t>
+            </a:r>
+            <a:r>
+              <a:rPr lang="en-US" sz="3000" dirty="0" spc="43" kern="0">
                 <a:solidFill>
                   <a:srgbClr val="6B6A66"/>
                 </a:solidFill>
@@ -4881,17 +4870,6 @@
                 <a:cs typeface="Be Vietnam Pro" pitchFamily="34" charset="-120"/>
               </a:rPr>
               <a:t> chỗ</a:t>
-            </a:r>
-            <a:r>
-              <a:rPr lang="en-US" sz="3000" dirty="0" spc="21" kern="0">
-                <a:solidFill>
-                  <a:srgbClr val="6B6A66"/>
-                </a:solidFill>
-                <a:latin typeface="Be Vietnam Pro" pitchFamily="34" charset="0"/>
-                <a:ea typeface="Be Vietnam Pro" pitchFamily="34" charset="-122"/>
-                <a:cs typeface="Be Vietnam Pro" pitchFamily="34" charset="-120"/>
-              </a:rPr>
-              <a:t> để</a:t>
             </a:r>
             <a:r>
               <a:rPr lang="en-US" sz="3000" dirty="0" spc="-18" kern="0">
@@ -7325,28 +7303,6 @@
               </a:rPr>
               <a:t> VOLUME</a:t>
             </a:r>
-            <a:r>
-              <a:rPr lang="en-US" sz="2100" b="1" spc="119" kern="0" dirty="0">
-                <a:solidFill>
-                  <a:srgbClr val="6B6A66"/>
-                </a:solidFill>
-                <a:latin typeface="Be Vietnam Pro" pitchFamily="34" charset="0"/>
-                <a:ea typeface="Be Vietnam Pro" pitchFamily="34" charset="-122"/>
-                <a:cs typeface="Be Vietnam Pro" pitchFamily="34" charset="-120"/>
-              </a:rPr>
-              <a:t> HOẶC</a:t>
-            </a:r>
-            <a:r>
-              <a:rPr lang="en-US" sz="2100" b="1" spc="149" kern="0" dirty="0">
-                <a:solidFill>
-                  <a:srgbClr val="6B6A66"/>
-                </a:solidFill>
-                <a:latin typeface="Be Vietnam Pro" pitchFamily="34" charset="0"/>
-                <a:ea typeface="Be Vietnam Pro" pitchFamily="34" charset="-122"/>
-                <a:cs typeface="Be Vietnam Pro" pitchFamily="34" charset="-120"/>
-              </a:rPr>
-              <a:t> MẠNG</a:t>
-            </a:r>
             <a:endParaRPr lang="en-US" sz="2100" dirty="0"/>
           </a:p>
         </p:txBody>
@@ -11218,7 +11174,7 @@
               <a:buNone/>
             </a:pPr>
             <a:r>
-              <a:rPr lang="en-US" sz="2700" dirty="0" spc="-55" kern="0">
+              <a:rPr lang="en-US" sz="2700" dirty="0" spc="2" kern="0">
                 <a:solidFill>
                   <a:srgbClr val="E4E1D8"/>
                 </a:solidFill>
@@ -11226,10 +11182,10 @@
                 <a:ea typeface="Be Vietnam Pro" pitchFamily="34" charset="-122"/>
                 <a:cs typeface="Be Vietnam Pro" pitchFamily="34" charset="-120"/>
               </a:rPr>
-              <a:t>Là</a:t>
-            </a:r>
-            <a:r>
-              <a:rPr lang="en-US" sz="2700" dirty="0" spc="1" kern="0">
+              <a:t>Cách</a:t>
+            </a:r>
+            <a:r>
+              <a:rPr lang="en-US" sz="2700" dirty="0" spc="-2" kern="0">
                 <a:solidFill>
                   <a:srgbClr val="E4E1D8"/>
                 </a:solidFill>
@@ -11237,7 +11193,40 @@
                 <a:ea typeface="Be Vietnam Pro" pitchFamily="34" charset="-122"/>
                 <a:cs typeface="Be Vietnam Pro" pitchFamily="34" charset="-120"/>
               </a:rPr>
-              <a:t> cách</a:t>
+              <a:t> hiển</a:t>
+            </a:r>
+            <a:r>
+              <a:rPr lang="en-US" sz="2700" dirty="0" spc="-1" kern="0">
+                <a:solidFill>
+                  <a:srgbClr val="E4E1D8"/>
+                </a:solidFill>
+                <a:latin typeface="Be Vietnam Pro" pitchFamily="34" charset="0"/>
+                <a:ea typeface="Be Vietnam Pro" pitchFamily="34" charset="-122"/>
+                <a:cs typeface="Be Vietnam Pro" pitchFamily="34" charset="-120"/>
+              </a:rPr>
+              <a:t> thị</a:t>
+            </a:r>
+            <a:r>
+              <a:rPr lang="en-US" sz="2700" dirty="0" spc="-14" kern="0">
+                <a:solidFill>
+                  <a:srgbClr val="E4E1D8"/>
+                </a:solidFill>
+                <a:latin typeface="Be Vietnam Pro" pitchFamily="34" charset="0"/>
+                <a:ea typeface="Be Vietnam Pro" pitchFamily="34" charset="-122"/>
+                <a:cs typeface="Be Vietnam Pro" pitchFamily="34" charset="-120"/>
+              </a:rPr>
+              <a:t> tóm</a:t>
+            </a:r>
+            <a:r>
+              <a:rPr lang="en-US" sz="2700" dirty="0" spc="-19" kern="0">
+                <a:solidFill>
+                  <a:srgbClr val="E4E1D8"/>
+                </a:solidFill>
+                <a:latin typeface="Be Vietnam Pro" pitchFamily="34" charset="0"/>
+                <a:ea typeface="Be Vietnam Pro" pitchFamily="34" charset="-122"/>
+                <a:cs typeface="Be Vietnam Pro" pitchFamily="34" charset="-120"/>
+              </a:rPr>
+              <a:t> tắt,</a:t>
             </a:r>
             <a:r>
               <a:rPr lang="en-US" sz="2700" dirty="0" spc="-2" kern="0">
@@ -11248,51 +11237,7 @@
                 <a:ea typeface="Be Vietnam Pro" pitchFamily="34" charset="-122"/>
                 <a:cs typeface="Be Vietnam Pro" pitchFamily="34" charset="-120"/>
               </a:rPr>
-              <a:t> hiển thị</a:t>
-            </a:r>
-            <a:r>
-              <a:rPr lang="en-US" sz="2700" dirty="0" spc="-14" kern="0">
-                <a:solidFill>
-                  <a:srgbClr val="E4E1D8"/>
-                </a:solidFill>
-                <a:latin typeface="Be Vietnam Pro" pitchFamily="34" charset="0"/>
-                <a:ea typeface="Be Vietnam Pro" pitchFamily="34" charset="-122"/>
-                <a:cs typeface="Be Vietnam Pro" pitchFamily="34" charset="-120"/>
-              </a:rPr>
-              <a:t> tóm</a:t>
-            </a:r>
-            <a:r>
-              <a:rPr lang="en-US" sz="2700" dirty="0" spc="-19" kern="0">
-                <a:solidFill>
-                  <a:srgbClr val="E4E1D8"/>
-                </a:solidFill>
-                <a:latin typeface="Be Vietnam Pro" pitchFamily="34" charset="0"/>
-                <a:ea typeface="Be Vietnam Pro" pitchFamily="34" charset="-122"/>
-                <a:cs typeface="Be Vietnam Pro" pitchFamily="34" charset="-120"/>
-              </a:rPr>
-              <a:t> tắt,</a:t>
-            </a:r>
-            <a:r>
-              <a:rPr lang="en-US" sz="2700" dirty="0" spc="-2" kern="0">
-                <a:solidFill>
-                  <a:srgbClr val="E4E1D8"/>
-                </a:solidFill>
-                <a:latin typeface="Be Vietnam Pro" pitchFamily="34" charset="0"/>
-                <a:ea typeface="Be Vietnam Pro" pitchFamily="34" charset="-122"/>
-                <a:cs typeface="Be Vietnam Pro" pitchFamily="34" charset="-120"/>
-              </a:rPr>
-              <a:t> không</a:t>
-            </a:r>
-            <a:r>
-              <a:rPr lang="en-US" sz="2700" dirty="0" spc="-1" kern="0">
-                <a:solidFill>
-                  <a:srgbClr val="E4E1D8"/>
-                </a:solidFill>
-                <a:latin typeface="Be Vietnam Pro" pitchFamily="34" charset="0"/>
-                <a:ea typeface="Be Vietnam Pro" pitchFamily="34" charset="-122"/>
-                <a:cs typeface="Be Vietnam Pro" pitchFamily="34" charset="-120"/>
-              </a:rPr>
-              <a:t> phải</a:t>
+              <a:t> không phải</a:t>
             </a:r>
             <a:r>
               <a:rPr lang="en-US" sz="2700" dirty="0" spc="-6" kern="0">
@@ -12546,17 +12491,6 @@
                 <a:cs typeface="Be Vietnam Pro" pitchFamily="34" charset="-120"/>
               </a:rPr>
               <a:t> node</a:t>
-            </a:r>
-            <a:r>
-              <a:rPr lang="en-US" sz="2700" b="1" dirty="0" spc="-9" kern="0">
-                <a:solidFill>
-                  <a:srgbClr val="14161C"/>
-                </a:solidFill>
-                <a:latin typeface="Be Vietnam Pro" pitchFamily="34" charset="0"/>
-                <a:ea typeface="Be Vietnam Pro" pitchFamily="34" charset="-122"/>
-                <a:cs typeface="Be Vietnam Pro" pitchFamily="34" charset="-120"/>
-              </a:rPr>
-              <a:t> còn</a:t>
             </a:r>
             <a:r>
               <a:rPr lang="en-US" sz="2700" b="1" dirty="0" spc="-3" kern="0">

--- a/system-design-101/vi/lessons/sd-13-025/slides/sd-13-025.pptx
+++ b/system-design-101/vi/lessons/sd-13-025/slides/sd-13-025.pptx
@@ -32,12 +32,8 @@
       <p:regular r:id="rId18"/>
     </p:embeddedFont>
     <p:embeddedFont>
-      <p:font typeface="JetBrains Mono"/>
-      <p:bold r:id="rId20"/>
-    </p:embeddedFont>
-    <p:embeddedFont>
-      <p:font typeface="JetBrains Mono ExtraBold"/>
-      <p:regular r:id="rId21"/>
+      <p:font typeface="Be Vietnam Pro ExtraBold"/>
+      <p:regular r:id="rId20"/>
     </p:embeddedFont>
   </p:embeddedFontLst>
   <p:defaultTextStyle>
@@ -5875,7 +5871,7 @@
               <a:buNone/>
             </a:pPr>
             <a:r>
-              <a:rPr lang="en-US" sz="2400" b="1" dirty="0" spc="-3" kern="0">
+              <a:rPr lang="en-US" sz="2550" b="1" dirty="0" spc="1" kern="0">
                 <a:solidFill>
                   <a:srgbClr val="F3EEE3"/>
                 </a:solidFill>
@@ -5886,7 +5882,7 @@
               <a:t>Thiếu</a:t>
             </a:r>
             <a:r>
-              <a:rPr lang="en-US" sz="2400" b="1" dirty="0" spc="-2" kern="0">
+              <a:rPr lang="en-US" sz="2550" b="1" dirty="0" spc="0" kern="0">
                 <a:solidFill>
                   <a:srgbClr val="F3EEE3"/>
                 </a:solidFill>
@@ -5897,7 +5893,7 @@
               <a:t> tài</a:t>
             </a:r>
             <a:r>
-              <a:rPr lang="en-US" sz="2400" b="1" dirty="0" spc="-18" kern="0">
+              <a:rPr lang="en-US" sz="2550" b="1" dirty="0" spc="-16" kern="0">
                 <a:solidFill>
                   <a:srgbClr val="F3EEE3"/>
                 </a:solidFill>
@@ -5908,7 +5904,7 @@
               <a:t> nguyên</a:t>
             </a:r>
             <a:r>
-              <a:rPr lang="en-US" sz="2400" b="1" dirty="0" spc="-5" kern="0">
+              <a:rPr lang="en-US" sz="2550" b="1" dirty="0" spc="-4" kern="0">
                 <a:solidFill>
                   <a:srgbClr val="F3EEE3"/>
                 </a:solidFill>
@@ -5919,7 +5915,7 @@
               <a:t> theo</a:t>
             </a:r>
             <a:r>
-              <a:rPr lang="en-US" sz="2400" b="1" dirty="0" spc="-9" kern="0">
+              <a:rPr lang="en-US" sz="2550" b="1" dirty="0" spc="-12" kern="0">
                 <a:solidFill>
                   <a:srgbClr val="F3EEE3"/>
                 </a:solidFill>
@@ -5929,7 +5925,7 @@
               </a:rPr>
               <a:t> requests</a:t>
             </a:r>
-            <a:endParaRPr lang="en-US" sz="2400" dirty="0"/>
+            <a:endParaRPr lang="en-US" sz="2550" dirty="0"/>
           </a:p>
         </p:txBody>
       </p:sp>
@@ -5967,7 +5963,7 @@
               <a:buNone/>
             </a:pPr>
             <a:r>
-              <a:rPr lang="en-US" sz="2400" b="1" dirty="0" spc="-52" kern="0">
+              <a:rPr lang="en-US" sz="2550" b="1" dirty="0" spc="-52" kern="0">
                 <a:solidFill>
                   <a:srgbClr val="F3EEE3"/>
                 </a:solidFill>
@@ -5977,7 +5973,7 @@
               </a:rPr>
               <a:t>Taint</a:t>
             </a:r>
-            <a:endParaRPr lang="en-US" sz="2400" dirty="0"/>
+            <a:endParaRPr lang="en-US" sz="2550" dirty="0"/>
           </a:p>
         </p:txBody>
       </p:sp>
@@ -6015,7 +6011,7 @@
               <a:buNone/>
             </a:pPr>
             <a:r>
-              <a:rPr lang="en-US" sz="2400" b="1" dirty="0" spc="-8" kern="0">
+              <a:rPr lang="en-US" sz="2550" b="1" dirty="0" spc="-8" kern="0">
                 <a:solidFill>
                   <a:srgbClr val="F3EEE3"/>
                 </a:solidFill>
@@ -6025,7 +6021,7 @@
               </a:rPr>
               <a:t>nodeSelector</a:t>
             </a:r>
-            <a:endParaRPr lang="en-US" sz="2400" dirty="0"/>
+            <a:endParaRPr lang="en-US" sz="2550" dirty="0"/>
           </a:p>
         </p:txBody>
       </p:sp>
@@ -6063,7 +6059,7 @@
               <a:buNone/>
             </a:pPr>
             <a:r>
-              <a:rPr lang="en-US" sz="2400" b="1" dirty="0" spc="-15" kern="0">
+              <a:rPr lang="en-US" sz="2550" b="1" dirty="0" spc="-19" kern="0">
                 <a:solidFill>
                   <a:srgbClr val="F3EEE3"/>
                 </a:solidFill>
@@ -6074,7 +6070,7 @@
               <a:t>PVC</a:t>
             </a:r>
             <a:r>
-              <a:rPr lang="en-US" sz="2400" b="1" dirty="0" spc="9" kern="0">
+              <a:rPr lang="en-US" sz="2550" b="1" dirty="0" spc="12" kern="0">
                 <a:solidFill>
                   <a:srgbClr val="F3EEE3"/>
                 </a:solidFill>
@@ -6085,7 +6081,7 @@
               <a:t> chưa</a:t>
             </a:r>
             <a:r>
-              <a:rPr lang="en-US" sz="2400" b="1" dirty="0" spc="-4" kern="0">
+              <a:rPr lang="en-US" sz="2550" b="1" dirty="0" spc="-2" kern="0">
                 <a:solidFill>
                   <a:srgbClr val="F3EEE3"/>
                 </a:solidFill>
@@ -6095,7 +6091,7 @@
               </a:rPr>
               <a:t> gắn</a:t>
             </a:r>
-            <a:endParaRPr lang="en-US" sz="2400" dirty="0"/>
+            <a:endParaRPr lang="en-US" sz="2550" dirty="0"/>
           </a:p>
         </p:txBody>
       </p:sp>
@@ -7023,17 +7019,17 @@
               <a:buNone/>
             </a:pPr>
             <a:r>
-              <a:rPr lang="en-US" sz="2250" b="1" dirty="0" kern="0">
+              <a:rPr lang="en-US" sz="2550" b="1" dirty="0">
                 <a:solidFill>
                   <a:srgbClr val="F3EEE3"/>
                 </a:solidFill>
-                <a:latin typeface="JetBrains Mono" pitchFamily="34" charset="0"/>
-                <a:ea typeface="JetBrains Mono" pitchFamily="34" charset="-122"/>
-                <a:cs typeface="JetBrains Mono" pitchFamily="34" charset="-120"/>
+                <a:latin typeface="Be Vietnam Pro" pitchFamily="34" charset="0"/>
+                <a:ea typeface="Be Vietnam Pro" pitchFamily="34" charset="-122"/>
+                <a:cs typeface="Be Vietnam Pro" pitchFamily="34" charset="-120"/>
               </a:rPr>
               <a:t>ErrImagePull → ImagePullBackOff</a:t>
             </a:r>
-            <a:endParaRPr lang="en-US" sz="2250" dirty="0"/>
+            <a:endParaRPr lang="en-US" sz="2550" dirty="0"/>
           </a:p>
         </p:txBody>
       </p:sp>
@@ -8300,13 +8296,13 @@
               <a:buNone/>
             </a:pPr>
             <a:r>
-              <a:rPr lang="en-US" sz="3000" dirty="0" kern="0">
+              <a:rPr lang="en-US" sz="3000" dirty="0" spc="-18" kern="0">
                 <a:solidFill>
                   <a:srgbClr val="FF6A4D"/>
                 </a:solidFill>
-                <a:latin typeface="JetBrains Mono ExtraBold" pitchFamily="34" charset="0"/>
-                <a:ea typeface="JetBrains Mono ExtraBold" pitchFamily="34" charset="-122"/>
-                <a:cs typeface="JetBrains Mono ExtraBold" pitchFamily="34" charset="-120"/>
+                <a:latin typeface="Be Vietnam Pro ExtraBold" pitchFamily="34" charset="0"/>
+                <a:ea typeface="Be Vietnam Pro ExtraBold" pitchFamily="34" charset="-122"/>
+                <a:cs typeface="Be Vietnam Pro ExtraBold" pitchFamily="34" charset="-120"/>
               </a:rPr>
               <a:t>CrashLoopBackOff</a:t>
             </a:r>
@@ -8625,13 +8621,13 @@
               <a:buNone/>
             </a:pPr>
             <a:r>
-              <a:rPr lang="en-US" sz="3000" dirty="0" kern="0">
+              <a:rPr lang="en-US" sz="3000" dirty="0" spc="-6" kern="0">
                 <a:solidFill>
                   <a:srgbClr val="FF6A4D"/>
                 </a:solidFill>
-                <a:latin typeface="JetBrains Mono ExtraBold" pitchFamily="34" charset="0"/>
-                <a:ea typeface="JetBrains Mono ExtraBold" pitchFamily="34" charset="-122"/>
-                <a:cs typeface="JetBrains Mono ExtraBold" pitchFamily="34" charset="-120"/>
+                <a:latin typeface="Be Vietnam Pro ExtraBold" pitchFamily="34" charset="0"/>
+                <a:ea typeface="Be Vietnam Pro ExtraBold" pitchFamily="34" charset="-122"/>
+                <a:cs typeface="Be Vietnam Pro ExtraBold" pitchFamily="34" charset="-120"/>
               </a:rPr>
               <a:t>OOMKilled</a:t>
             </a:r>
@@ -10173,7 +10169,7 @@
           <a:ln/>
         </p:spPr>
         <p:txBody>
-          <a:bodyPr wrap="square" lIns="0" tIns="7271" rIns="0" bIns="-7271" rtlCol="0" anchor="t"/>
+          <a:bodyPr wrap="square" lIns="0" tIns="9700" rIns="0" bIns="-9700" rtlCol="0" anchor="t"/>
           <a:lstStyle/>
           <a:p>
             <a:pPr algn="l" indent="0" marL="0">
@@ -10183,15 +10179,37 @@
               <a:buNone/>
             </a:pPr>
             <a:r>
-              <a:rPr lang="en-US" sz="2550" b="1" dirty="0" spc="5" kern="0">
+              <a:rPr lang="en-US" sz="2550" b="1" dirty="0" spc="-2" kern="0">
                 <a:solidFill>
                   <a:srgbClr val="7C93FF"/>
                 </a:solidFill>
-                <a:latin typeface="JetBrains Mono" pitchFamily="34" charset="0"/>
-                <a:ea typeface="JetBrains Mono" pitchFamily="34" charset="-122"/>
-                <a:cs typeface="JetBrains Mono" pitchFamily="34" charset="-120"/>
-              </a:rPr>
-              <a:t>kubectl describe pod</a:t>
+                <a:latin typeface="Be Vietnam Pro" pitchFamily="34" charset="0"/>
+                <a:ea typeface="Be Vietnam Pro" pitchFamily="34" charset="-122"/>
+                <a:cs typeface="Be Vietnam Pro" pitchFamily="34" charset="-120"/>
+              </a:rPr>
+              <a:t>kubectl</a:t>
+            </a:r>
+            <a:r>
+              <a:rPr lang="en-US" sz="2550" b="1" dirty="0" spc="0" kern="0">
+                <a:solidFill>
+                  <a:srgbClr val="7C93FF"/>
+                </a:solidFill>
+                <a:latin typeface="Be Vietnam Pro" pitchFamily="34" charset="0"/>
+                <a:ea typeface="Be Vietnam Pro" pitchFamily="34" charset="-122"/>
+                <a:cs typeface="Be Vietnam Pro" pitchFamily="34" charset="-120"/>
+              </a:rPr>
+              <a:t> describe</a:t>
+            </a:r>
+            <a:r>
+              <a:rPr lang="en-US" sz="2550" b="1" dirty="0" spc="-4" kern="0">
+                <a:solidFill>
+                  <a:srgbClr val="7C93FF"/>
+                </a:solidFill>
+                <a:latin typeface="Be Vietnam Pro" pitchFamily="34" charset="0"/>
+                <a:ea typeface="Be Vietnam Pro" pitchFamily="34" charset="-122"/>
+                <a:cs typeface="Be Vietnam Pro" pitchFamily="34" charset="-120"/>
+              </a:rPr>
+              <a:t> pod</a:t>
             </a:r>
             <a:endParaRPr lang="en-US" sz="2550" dirty="0"/>
           </a:p>
@@ -12386,7 +12404,7 @@
           <a:ln/>
         </p:spPr>
         <p:txBody>
-          <a:bodyPr wrap="square" lIns="0" tIns="7271" rIns="0" bIns="-7271" rtlCol="0" anchor="t"/>
+          <a:bodyPr wrap="square" lIns="0" tIns="9700" rIns="0" bIns="-9700" rtlCol="0" anchor="t"/>
           <a:lstStyle/>
           <a:p>
             <a:pPr algn="l" indent="0" marL="0">
@@ -12396,15 +12414,70 @@
               <a:buNone/>
             </a:pPr>
             <a:r>
-              <a:rPr lang="en-US" sz="2550" b="1" dirty="0" spc="5" kern="0">
+              <a:rPr lang="en-US" sz="2550" b="1" dirty="0" spc="-8" kern="0">
                 <a:solidFill>
                   <a:srgbClr val="B45309"/>
                 </a:solidFill>
-                <a:latin typeface="JetBrains Mono" pitchFamily="34" charset="0"/>
-                <a:ea typeface="JetBrains Mono" pitchFamily="34" charset="-122"/>
-                <a:cs typeface="JetBrains Mono" pitchFamily="34" charset="-120"/>
-              </a:rPr>
-              <a:t>nodes are available: 3 Insufficient memory</a:t>
+                <a:latin typeface="Be Vietnam Pro" pitchFamily="34" charset="0"/>
+                <a:ea typeface="Be Vietnam Pro" pitchFamily="34" charset="-122"/>
+                <a:cs typeface="Be Vietnam Pro" pitchFamily="34" charset="-120"/>
+              </a:rPr>
+              <a:t>nodes</a:t>
+            </a:r>
+            <a:r>
+              <a:rPr lang="en-US" sz="2550" b="1" dirty="0" spc="-15" kern="0">
+                <a:solidFill>
+                  <a:srgbClr val="B45309"/>
+                </a:solidFill>
+                <a:latin typeface="Be Vietnam Pro" pitchFamily="34" charset="0"/>
+                <a:ea typeface="Be Vietnam Pro" pitchFamily="34" charset="-122"/>
+                <a:cs typeface="Be Vietnam Pro" pitchFamily="34" charset="-120"/>
+              </a:rPr>
+              <a:t> are</a:t>
+            </a:r>
+            <a:r>
+              <a:rPr lang="en-US" sz="2550" b="1" dirty="0" spc="-12" kern="0">
+                <a:solidFill>
+                  <a:srgbClr val="B45309"/>
+                </a:solidFill>
+                <a:latin typeface="Be Vietnam Pro" pitchFamily="34" charset="0"/>
+                <a:ea typeface="Be Vietnam Pro" pitchFamily="34" charset="-122"/>
+                <a:cs typeface="Be Vietnam Pro" pitchFamily="34" charset="-120"/>
+              </a:rPr>
+              <a:t> available:</a:t>
+            </a:r>
+            <a:r>
+              <a:rPr lang="en-US" sz="2550" b="1" dirty="0" spc="-2" kern="0">
+                <a:solidFill>
+                  <a:srgbClr val="B45309"/>
+                </a:solidFill>
+                <a:latin typeface="Be Vietnam Pro" pitchFamily="34" charset="0"/>
+                <a:ea typeface="Be Vietnam Pro" pitchFamily="34" charset="-122"/>
+                <a:cs typeface="Be Vietnam Pro" pitchFamily="34" charset="-120"/>
+              </a:rPr>
+              <a:t> 3</a:t>
+            </a:r>
+            <a:r>
+              <a:rPr lang="en-US" sz="2550" b="1" dirty="0" spc="-7" kern="0">
+                <a:solidFill>
+                  <a:srgbClr val="B45309"/>
+                </a:solidFill>
+                <a:latin typeface="Be Vietnam Pro" pitchFamily="34" charset="0"/>
+                <a:ea typeface="Be Vietnam Pro" pitchFamily="34" charset="-122"/>
+                <a:cs typeface="Be Vietnam Pro" pitchFamily="34" charset="-120"/>
+              </a:rPr>
+              <a:t> Insufficient</a:t>
+            </a:r>
+            <a:r>
+              <a:rPr lang="en-US" sz="2550" b="1" dirty="0" spc="-5" kern="0">
+                <a:solidFill>
+                  <a:srgbClr val="B45309"/>
+                </a:solidFill>
+                <a:latin typeface="Be Vietnam Pro" pitchFamily="34" charset="0"/>
+                <a:ea typeface="Be Vietnam Pro" pitchFamily="34" charset="-122"/>
+                <a:cs typeface="Be Vietnam Pro" pitchFamily="34" charset="-120"/>
+              </a:rPr>
+              <a:t> memory</a:t>
             </a:r>
             <a:endParaRPr lang="en-US" sz="2550" dirty="0"/>
           </a:p>
@@ -13772,15 +13845,37 @@
               <a:buNone/>
             </a:pPr>
             <a:r>
-              <a:rPr lang="en-US" sz="2550" dirty="0" spc="5" kern="0">
-                <a:solidFill>
-                  <a:srgbClr val="14161C"/>
-                </a:solidFill>
-                <a:latin typeface="JetBrains Mono ExtraBold" pitchFamily="34" charset="0"/>
-                <a:ea typeface="JetBrains Mono ExtraBold" pitchFamily="34" charset="-122"/>
-                <a:cs typeface="JetBrains Mono ExtraBold" pitchFamily="34" charset="-120"/>
-              </a:rPr>
-              <a:t>kubectl describe pod</a:t>
+              <a:rPr lang="en-US" sz="2550" dirty="0" spc="-4" kern="0">
+                <a:solidFill>
+                  <a:srgbClr val="14161C"/>
+                </a:solidFill>
+                <a:latin typeface="Be Vietnam Pro ExtraBold" pitchFamily="34" charset="0"/>
+                <a:ea typeface="Be Vietnam Pro ExtraBold" pitchFamily="34" charset="-122"/>
+                <a:cs typeface="Be Vietnam Pro ExtraBold" pitchFamily="34" charset="-120"/>
+              </a:rPr>
+              <a:t>kubectl</a:t>
+            </a:r>
+            <a:r>
+              <a:rPr lang="en-US" sz="2550" dirty="0" spc="1" kern="0">
+                <a:solidFill>
+                  <a:srgbClr val="14161C"/>
+                </a:solidFill>
+                <a:latin typeface="Be Vietnam Pro ExtraBold" pitchFamily="34" charset="0"/>
+                <a:ea typeface="Be Vietnam Pro ExtraBold" pitchFamily="34" charset="-122"/>
+                <a:cs typeface="Be Vietnam Pro ExtraBold" pitchFamily="34" charset="-120"/>
+              </a:rPr>
+              <a:t> describe</a:t>
+            </a:r>
+            <a:r>
+              <a:rPr lang="en-US" sz="2550" dirty="0" spc="-4" kern="0">
+                <a:solidFill>
+                  <a:srgbClr val="14161C"/>
+                </a:solidFill>
+                <a:latin typeface="Be Vietnam Pro ExtraBold" pitchFamily="34" charset="0"/>
+                <a:ea typeface="Be Vietnam Pro ExtraBold" pitchFamily="34" charset="-122"/>
+                <a:cs typeface="Be Vietnam Pro ExtraBold" pitchFamily="34" charset="-120"/>
+              </a:rPr>
+              <a:t> pod</a:t>
             </a:r>
             <a:endParaRPr lang="en-US" sz="2550" dirty="0"/>
           </a:p>
@@ -13976,15 +14071,37 @@
               <a:buNone/>
             </a:pPr>
             <a:r>
-              <a:rPr lang="en-US" sz="2550" dirty="0" spc="5" kern="0">
+              <a:rPr lang="en-US" sz="2550" dirty="0" spc="-4" kern="0">
                 <a:solidFill>
                   <a:srgbClr val="E8472B"/>
                 </a:solidFill>
-                <a:latin typeface="JetBrains Mono ExtraBold" pitchFamily="34" charset="0"/>
-                <a:ea typeface="JetBrains Mono ExtraBold" pitchFamily="34" charset="-122"/>
-                <a:cs typeface="JetBrains Mono ExtraBold" pitchFamily="34" charset="-120"/>
-              </a:rPr>
-              <a:t>kubectl logs ten-pod --previous</a:t>
+                <a:latin typeface="Be Vietnam Pro ExtraBold" pitchFamily="34" charset="0"/>
+                <a:ea typeface="Be Vietnam Pro ExtraBold" pitchFamily="34" charset="-122"/>
+                <a:cs typeface="Be Vietnam Pro ExtraBold" pitchFamily="34" charset="-120"/>
+              </a:rPr>
+              <a:t>kubectl</a:t>
+            </a:r>
+            <a:r>
+              <a:rPr lang="en-US" sz="2550" dirty="0" spc="-6" kern="0">
+                <a:solidFill>
+                  <a:srgbClr val="E8472B"/>
+                </a:solidFill>
+                <a:latin typeface="Be Vietnam Pro ExtraBold" pitchFamily="34" charset="0"/>
+                <a:ea typeface="Be Vietnam Pro ExtraBold" pitchFamily="34" charset="-122"/>
+                <a:cs typeface="Be Vietnam Pro ExtraBold" pitchFamily="34" charset="-120"/>
+              </a:rPr>
+              <a:t> logs ten-pod</a:t>
+            </a:r>
+            <a:r>
+              <a:rPr lang="en-US" sz="2550" dirty="0" spc="-10" kern="0">
+                <a:solidFill>
+                  <a:srgbClr val="E8472B"/>
+                </a:solidFill>
+                <a:latin typeface="Be Vietnam Pro ExtraBold" pitchFamily="34" charset="0"/>
+                <a:ea typeface="Be Vietnam Pro ExtraBold" pitchFamily="34" charset="-122"/>
+                <a:cs typeface="Be Vietnam Pro ExtraBold" pitchFamily="34" charset="-120"/>
+              </a:rPr>
+              <a:t> --previous</a:t>
             </a:r>
             <a:endParaRPr lang="en-US" sz="2550" dirty="0"/>
           </a:p>
@@ -14180,15 +14297,37 @@
               <a:buNone/>
             </a:pPr>
             <a:r>
-              <a:rPr lang="en-US" sz="2550" dirty="0" spc="5" kern="0">
-                <a:solidFill>
-                  <a:srgbClr val="14161C"/>
-                </a:solidFill>
-                <a:latin typeface="JetBrains Mono ExtraBold" pitchFamily="34" charset="0"/>
-                <a:ea typeface="JetBrains Mono ExtraBold" pitchFamily="34" charset="-122"/>
-                <a:cs typeface="JetBrains Mono ExtraBold" pitchFamily="34" charset="-120"/>
-              </a:rPr>
-              <a:t>kubectl get events</a:t>
+              <a:rPr lang="en-US" sz="2550" dirty="0" spc="-4" kern="0">
+                <a:solidFill>
+                  <a:srgbClr val="14161C"/>
+                </a:solidFill>
+                <a:latin typeface="Be Vietnam Pro ExtraBold" pitchFamily="34" charset="0"/>
+                <a:ea typeface="Be Vietnam Pro ExtraBold" pitchFamily="34" charset="-122"/>
+                <a:cs typeface="Be Vietnam Pro ExtraBold" pitchFamily="34" charset="-120"/>
+              </a:rPr>
+              <a:t>kubectl</a:t>
+            </a:r>
+            <a:r>
+              <a:rPr lang="en-US" sz="2550" dirty="0" spc="-10" kern="0">
+                <a:solidFill>
+                  <a:srgbClr val="14161C"/>
+                </a:solidFill>
+                <a:latin typeface="Be Vietnam Pro ExtraBold" pitchFamily="34" charset="0"/>
+                <a:ea typeface="Be Vietnam Pro ExtraBold" pitchFamily="34" charset="-122"/>
+                <a:cs typeface="Be Vietnam Pro ExtraBold" pitchFamily="34" charset="-120"/>
+              </a:rPr>
+              <a:t> get</a:t>
+            </a:r>
+            <a:r>
+              <a:rPr lang="en-US" sz="2550" dirty="0" spc="-23" kern="0">
+                <a:solidFill>
+                  <a:srgbClr val="14161C"/>
+                </a:solidFill>
+                <a:latin typeface="Be Vietnam Pro ExtraBold" pitchFamily="34" charset="0"/>
+                <a:ea typeface="Be Vietnam Pro ExtraBold" pitchFamily="34" charset="-122"/>
+                <a:cs typeface="Be Vietnam Pro ExtraBold" pitchFamily="34" charset="-120"/>
+              </a:rPr>
+              <a:t> events</a:t>
             </a:r>
             <a:endParaRPr lang="en-US" sz="2550" dirty="0"/>
           </a:p>
@@ -14197,13 +14336,13 @@
               <a:buNone/>
             </a:pPr>
             <a:r>
-              <a:rPr lang="en-US" sz="2550" dirty="0" spc="5" kern="0">
-                <a:solidFill>
-                  <a:srgbClr val="14161C"/>
-                </a:solidFill>
-                <a:latin typeface="JetBrains Mono ExtraBold" pitchFamily="34" charset="0"/>
-                <a:ea typeface="JetBrains Mono ExtraBold" pitchFamily="34" charset="-122"/>
-                <a:cs typeface="JetBrains Mono ExtraBold" pitchFamily="34" charset="-120"/>
+              <a:rPr lang="en-US" sz="2550" dirty="0" spc="-7" kern="0">
+                <a:solidFill>
+                  <a:srgbClr val="14161C"/>
+                </a:solidFill>
+                <a:latin typeface="Be Vietnam Pro ExtraBold" pitchFamily="34" charset="0"/>
+                <a:ea typeface="Be Vietnam Pro ExtraBold" pitchFamily="34" charset="-122"/>
+                <a:cs typeface="Be Vietnam Pro ExtraBold" pitchFamily="34" charset="-120"/>
               </a:rPr>
               <a:t>--sort-by=.metadata.creationTimestamp</a:t>
             </a:r>
@@ -14390,15 +14529,37 @@
               <a:buNone/>
             </a:pPr>
             <a:r>
-              <a:rPr lang="en-US" sz="2550" dirty="0" spc="5" kern="0">
+              <a:rPr lang="en-US" sz="2550" dirty="0" spc="-4" kern="0">
                 <a:solidFill>
                   <a:srgbClr val="E8472B"/>
                 </a:solidFill>
-                <a:latin typeface="JetBrains Mono ExtraBold" pitchFamily="34" charset="0"/>
-                <a:ea typeface="JetBrains Mono ExtraBold" pitchFamily="34" charset="-122"/>
-                <a:cs typeface="JetBrains Mono ExtraBold" pitchFamily="34" charset="-120"/>
-              </a:rPr>
-              <a:t>kubectl describe node</a:t>
+                <a:latin typeface="Be Vietnam Pro ExtraBold" pitchFamily="34" charset="0"/>
+                <a:ea typeface="Be Vietnam Pro ExtraBold" pitchFamily="34" charset="-122"/>
+                <a:cs typeface="Be Vietnam Pro ExtraBold" pitchFamily="34" charset="-120"/>
+              </a:rPr>
+              <a:t>kubectl</a:t>
+            </a:r>
+            <a:r>
+              <a:rPr lang="en-US" sz="2550" dirty="0" spc="1" kern="0">
+                <a:solidFill>
+                  <a:srgbClr val="E8472B"/>
+                </a:solidFill>
+                <a:latin typeface="Be Vietnam Pro ExtraBold" pitchFamily="34" charset="0"/>
+                <a:ea typeface="Be Vietnam Pro ExtraBold" pitchFamily="34" charset="-122"/>
+                <a:cs typeface="Be Vietnam Pro ExtraBold" pitchFamily="34" charset="-120"/>
+              </a:rPr>
+              <a:t> describe</a:t>
+            </a:r>
+            <a:r>
+              <a:rPr lang="en-US" sz="2550" dirty="0" spc="-9" kern="0">
+                <a:solidFill>
+                  <a:srgbClr val="E8472B"/>
+                </a:solidFill>
+                <a:latin typeface="Be Vietnam Pro ExtraBold" pitchFamily="34" charset="0"/>
+                <a:ea typeface="Be Vietnam Pro ExtraBold" pitchFamily="34" charset="-122"/>
+                <a:cs typeface="Be Vietnam Pro ExtraBold" pitchFamily="34" charset="-120"/>
+              </a:rPr>
+              <a:t> node</a:t>
             </a:r>
             <a:endParaRPr lang="en-US" sz="2550" dirty="0"/>
           </a:p>
@@ -14605,15 +14766,59 @@
               <a:buNone/>
             </a:pPr>
             <a:r>
-              <a:rPr lang="en-US" sz="2550" dirty="0" spc="5" kern="0">
+              <a:rPr lang="en-US" sz="2550" dirty="0" spc="-4" kern="0">
                 <a:solidFill>
                   <a:srgbClr val="B45309"/>
                 </a:solidFill>
-                <a:latin typeface="JetBrains Mono ExtraBold" pitchFamily="34" charset="0"/>
-                <a:ea typeface="JetBrains Mono ExtraBold" pitchFamily="34" charset="-122"/>
-                <a:cs typeface="JetBrains Mono ExtraBold" pitchFamily="34" charset="-120"/>
-              </a:rPr>
-              <a:t>kubectl get pod -o yaml</a:t>
+                <a:latin typeface="Be Vietnam Pro ExtraBold" pitchFamily="34" charset="0"/>
+                <a:ea typeface="Be Vietnam Pro ExtraBold" pitchFamily="34" charset="-122"/>
+                <a:cs typeface="Be Vietnam Pro ExtraBold" pitchFamily="34" charset="-120"/>
+              </a:rPr>
+              <a:t>kubectl</a:t>
+            </a:r>
+            <a:r>
+              <a:rPr lang="en-US" sz="2550" dirty="0" spc="-10" kern="0">
+                <a:solidFill>
+                  <a:srgbClr val="B45309"/>
+                </a:solidFill>
+                <a:latin typeface="Be Vietnam Pro ExtraBold" pitchFamily="34" charset="0"/>
+                <a:ea typeface="Be Vietnam Pro ExtraBold" pitchFamily="34" charset="-122"/>
+                <a:cs typeface="Be Vietnam Pro ExtraBold" pitchFamily="34" charset="-120"/>
+              </a:rPr>
+              <a:t> get</a:t>
+            </a:r>
+            <a:r>
+              <a:rPr lang="en-US" sz="2550" dirty="0" spc="-4" kern="0">
+                <a:solidFill>
+                  <a:srgbClr val="B45309"/>
+                </a:solidFill>
+                <a:latin typeface="Be Vietnam Pro ExtraBold" pitchFamily="34" charset="0"/>
+                <a:ea typeface="Be Vietnam Pro ExtraBold" pitchFamily="34" charset="-122"/>
+                <a:cs typeface="Be Vietnam Pro ExtraBold" pitchFamily="34" charset="-120"/>
+              </a:rPr>
+              <a:t> pod</a:t>
+            </a:r>
+            <a:r>
+              <a:rPr lang="en-US" sz="2550" dirty="0" spc="0" kern="0">
+                <a:solidFill>
+                  <a:srgbClr val="B45309"/>
+                </a:solidFill>
+                <a:latin typeface="Be Vietnam Pro ExtraBold" pitchFamily="34" charset="0"/>
+                <a:ea typeface="Be Vietnam Pro ExtraBold" pitchFamily="34" charset="-122"/>
+                <a:cs typeface="Be Vietnam Pro ExtraBold" pitchFamily="34" charset="-120"/>
+              </a:rPr>
+              <a:t> -o</a:t>
+            </a:r>
+            <a:r>
+              <a:rPr lang="en-US" sz="2550" dirty="0" spc="-15" kern="0">
+                <a:solidFill>
+                  <a:srgbClr val="B45309"/>
+                </a:solidFill>
+                <a:latin typeface="Be Vietnam Pro ExtraBold" pitchFamily="34" charset="0"/>
+                <a:ea typeface="Be Vietnam Pro ExtraBold" pitchFamily="34" charset="-122"/>
+                <a:cs typeface="Be Vietnam Pro ExtraBold" pitchFamily="34" charset="-120"/>
+              </a:rPr>
+              <a:t> yaml</a:t>
             </a:r>
             <a:endParaRPr lang="en-US" sz="2550" dirty="0"/>
           </a:p>

--- a/system-design-101/vi/lessons/sd-13-025/slides/sd-13-025.pptx
+++ b/system-design-101/vi/lessons/sd-13-025/slides/sd-13-025.pptx
@@ -13877,6 +13877,17 @@
               </a:rPr>
               <a:t> pod</a:t>
             </a:r>
+            <a:r>
+              <a:rPr lang="en-US" sz="2550" dirty="0" spc="-6" kern="0">
+                <a:solidFill>
+                  <a:srgbClr val="14161C"/>
+                </a:solidFill>
+                <a:latin typeface="Be Vietnam Pro ExtraBold" pitchFamily="34" charset="0"/>
+                <a:ea typeface="Be Vietnam Pro ExtraBold" pitchFamily="34" charset="-122"/>
+                <a:cs typeface="Be Vietnam Pro ExtraBold" pitchFamily="34" charset="-120"/>
+              </a:rPr>
+              <a:t> ten-pod</a:t>
+            </a:r>
             <a:endParaRPr lang="en-US" sz="2550" dirty="0"/>
           </a:p>
         </p:txBody>
